--- a/documentation/model_structure.pptx
+++ b/documentation/model_structure.pptx
@@ -4,10 +4,14 @@
   <p:sldMasterIdLst>
     <p:sldMasterId id="2147483648" r:id="rId1"/>
   </p:sldMasterIdLst>
+  <p:notesMasterIdLst>
+    <p:notesMasterId r:id="rId6"/>
+  </p:notesMasterIdLst>
   <p:sldIdLst>
     <p:sldId id="256" r:id="rId2"/>
     <p:sldId id="257" r:id="rId3"/>
     <p:sldId id="258" r:id="rId4"/>
+    <p:sldId id="922" r:id="rId5"/>
   </p:sldIdLst>
   <p:sldSz cx="12192000" cy="6858000"/>
   <p:notesSz cx="6858000" cy="9144000"/>
@@ -114,6 +118,583 @@
 </p:presentation>
 </file>
 
+<file path=ppt/notesMasters/notesMaster1.xml><?xml version="1.0" encoding="utf-8"?>
+<p:notesMaster xmlns:a="http://schemas.openxmlformats.org/drawingml/2006/main" xmlns:r="http://schemas.openxmlformats.org/officeDocument/2006/relationships" xmlns:p="http://schemas.openxmlformats.org/presentationml/2006/main">
+  <p:cSld>
+    <p:bg>
+      <p:bgRef idx="1001">
+        <a:schemeClr val="bg1"/>
+      </p:bgRef>
+    </p:bg>
+    <p:spTree>
+      <p:nvGrpSpPr>
+        <p:cNvPr id="1" name=""/>
+        <p:cNvGrpSpPr/>
+        <p:nvPr/>
+      </p:nvGrpSpPr>
+      <p:grpSpPr>
+        <a:xfrm>
+          <a:off x="0" y="0"/>
+          <a:ext cx="0" cy="0"/>
+          <a:chOff x="0" y="0"/>
+          <a:chExt cx="0" cy="0"/>
+        </a:xfrm>
+      </p:grpSpPr>
+      <p:sp>
+        <p:nvSpPr>
+          <p:cNvPr id="2" name="Header Placeholder 1"/>
+          <p:cNvSpPr>
+            <a:spLocks noGrp="1"/>
+          </p:cNvSpPr>
+          <p:nvPr>
+            <p:ph type="hdr" sz="quarter"/>
+          </p:nvPr>
+        </p:nvSpPr>
+        <p:spPr>
+          <a:xfrm>
+            <a:off x="0" y="0"/>
+            <a:ext cx="2971800" cy="458788"/>
+          </a:xfrm>
+          <a:prstGeom prst="rect">
+            <a:avLst/>
+          </a:prstGeom>
+        </p:spPr>
+        <p:txBody>
+          <a:bodyPr vert="horz" lIns="91440" tIns="45720" rIns="91440" bIns="45720" rtlCol="0"/>
+          <a:lstStyle>
+            <a:lvl1pPr algn="l">
+              <a:defRPr sz="1200"/>
+            </a:lvl1pPr>
+          </a:lstStyle>
+          <a:p>
+            <a:endParaRPr lang="en-US"/>
+          </a:p>
+        </p:txBody>
+      </p:sp>
+      <p:sp>
+        <p:nvSpPr>
+          <p:cNvPr id="3" name="Date Placeholder 2"/>
+          <p:cNvSpPr>
+            <a:spLocks noGrp="1"/>
+          </p:cNvSpPr>
+          <p:nvPr>
+            <p:ph type="dt" idx="1"/>
+          </p:nvPr>
+        </p:nvSpPr>
+        <p:spPr>
+          <a:xfrm>
+            <a:off x="3884613" y="0"/>
+            <a:ext cx="2971800" cy="458788"/>
+          </a:xfrm>
+          <a:prstGeom prst="rect">
+            <a:avLst/>
+          </a:prstGeom>
+        </p:spPr>
+        <p:txBody>
+          <a:bodyPr vert="horz" lIns="91440" tIns="45720" rIns="91440" bIns="45720" rtlCol="0"/>
+          <a:lstStyle>
+            <a:lvl1pPr algn="r">
+              <a:defRPr sz="1200"/>
+            </a:lvl1pPr>
+          </a:lstStyle>
+          <a:p>
+            <a:fld id="{B2D6F2B4-4EE2-4D43-96E2-ED49BE61CE83}" type="datetimeFigureOut">
+              <a:rPr lang="en-US" smtClean="0"/>
+              <a:t>6/3/26</a:t>
+            </a:fld>
+            <a:endParaRPr lang="en-US"/>
+          </a:p>
+        </p:txBody>
+      </p:sp>
+      <p:sp>
+        <p:nvSpPr>
+          <p:cNvPr id="4" name="Slide Image Placeholder 3"/>
+          <p:cNvSpPr>
+            <a:spLocks noGrp="1" noRot="1" noChangeAspect="1"/>
+          </p:cNvSpPr>
+          <p:nvPr>
+            <p:ph type="sldImg" idx="2"/>
+          </p:nvPr>
+        </p:nvSpPr>
+        <p:spPr>
+          <a:xfrm>
+            <a:off x="685800" y="1143000"/>
+            <a:ext cx="5486400" cy="3086100"/>
+          </a:xfrm>
+          <a:prstGeom prst="rect">
+            <a:avLst/>
+          </a:prstGeom>
+          <a:noFill/>
+          <a:ln w="12700">
+            <a:solidFill>
+              <a:prstClr val="black"/>
+            </a:solidFill>
+          </a:ln>
+        </p:spPr>
+        <p:txBody>
+          <a:bodyPr vert="horz" lIns="91440" tIns="45720" rIns="91440" bIns="45720" rtlCol="0" anchor="ctr"/>
+          <a:lstStyle/>
+          <a:p>
+            <a:endParaRPr lang="en-US"/>
+          </a:p>
+        </p:txBody>
+      </p:sp>
+      <p:sp>
+        <p:nvSpPr>
+          <p:cNvPr id="5" name="Notes Placeholder 4"/>
+          <p:cNvSpPr>
+            <a:spLocks noGrp="1"/>
+          </p:cNvSpPr>
+          <p:nvPr>
+            <p:ph type="body" sz="quarter" idx="3"/>
+          </p:nvPr>
+        </p:nvSpPr>
+        <p:spPr>
+          <a:xfrm>
+            <a:off x="685800" y="4400550"/>
+            <a:ext cx="5486400" cy="3600450"/>
+          </a:xfrm>
+          <a:prstGeom prst="rect">
+            <a:avLst/>
+          </a:prstGeom>
+        </p:spPr>
+        <p:txBody>
+          <a:bodyPr vert="horz" lIns="91440" tIns="45720" rIns="91440" bIns="45720" rtlCol="0"/>
+          <a:lstStyle/>
+          <a:p>
+            <a:pPr lvl="0"/>
+            <a:r>
+              <a:rPr lang="en-US"/>
+              <a:t>Click to edit Master text styles</a:t>
+            </a:r>
+          </a:p>
+          <a:p>
+            <a:pPr lvl="1"/>
+            <a:r>
+              <a:rPr lang="en-US"/>
+              <a:t>Second level</a:t>
+            </a:r>
+          </a:p>
+          <a:p>
+            <a:pPr lvl="2"/>
+            <a:r>
+              <a:rPr lang="en-US"/>
+              <a:t>Third level</a:t>
+            </a:r>
+          </a:p>
+          <a:p>
+            <a:pPr lvl="3"/>
+            <a:r>
+              <a:rPr lang="en-US"/>
+              <a:t>Fourth level</a:t>
+            </a:r>
+          </a:p>
+          <a:p>
+            <a:pPr lvl="4"/>
+            <a:r>
+              <a:rPr lang="en-US"/>
+              <a:t>Fifth level</a:t>
+            </a:r>
+          </a:p>
+        </p:txBody>
+      </p:sp>
+      <p:sp>
+        <p:nvSpPr>
+          <p:cNvPr id="6" name="Footer Placeholder 5"/>
+          <p:cNvSpPr>
+            <a:spLocks noGrp="1"/>
+          </p:cNvSpPr>
+          <p:nvPr>
+            <p:ph type="ftr" sz="quarter" idx="4"/>
+          </p:nvPr>
+        </p:nvSpPr>
+        <p:spPr>
+          <a:xfrm>
+            <a:off x="0" y="8685213"/>
+            <a:ext cx="2971800" cy="458787"/>
+          </a:xfrm>
+          <a:prstGeom prst="rect">
+            <a:avLst/>
+          </a:prstGeom>
+        </p:spPr>
+        <p:txBody>
+          <a:bodyPr vert="horz" lIns="91440" tIns="45720" rIns="91440" bIns="45720" rtlCol="0" anchor="b"/>
+          <a:lstStyle>
+            <a:lvl1pPr algn="l">
+              <a:defRPr sz="1200"/>
+            </a:lvl1pPr>
+          </a:lstStyle>
+          <a:p>
+            <a:endParaRPr lang="en-US"/>
+          </a:p>
+        </p:txBody>
+      </p:sp>
+      <p:sp>
+        <p:nvSpPr>
+          <p:cNvPr id="7" name="Slide Number Placeholder 6"/>
+          <p:cNvSpPr>
+            <a:spLocks noGrp="1"/>
+          </p:cNvSpPr>
+          <p:nvPr>
+            <p:ph type="sldNum" sz="quarter" idx="5"/>
+          </p:nvPr>
+        </p:nvSpPr>
+        <p:spPr>
+          <a:xfrm>
+            <a:off x="3884613" y="8685213"/>
+            <a:ext cx="2971800" cy="458787"/>
+          </a:xfrm>
+          <a:prstGeom prst="rect">
+            <a:avLst/>
+          </a:prstGeom>
+        </p:spPr>
+        <p:txBody>
+          <a:bodyPr vert="horz" lIns="91440" tIns="45720" rIns="91440" bIns="45720" rtlCol="0" anchor="b"/>
+          <a:lstStyle>
+            <a:lvl1pPr algn="r">
+              <a:defRPr sz="1200"/>
+            </a:lvl1pPr>
+          </a:lstStyle>
+          <a:p>
+            <a:fld id="{2E2FC99A-9EFB-B646-B917-832B6E5EE87C}" type="slidenum">
+              <a:rPr lang="en-US" smtClean="0"/>
+              <a:t>‹#›</a:t>
+            </a:fld>
+            <a:endParaRPr lang="en-US"/>
+          </a:p>
+        </p:txBody>
+      </p:sp>
+    </p:spTree>
+    <p:extLst>
+      <p:ext uri="{BB962C8B-B14F-4D97-AF65-F5344CB8AC3E}">
+        <p14:creationId xmlns:p14="http://schemas.microsoft.com/office/powerpoint/2010/main" val="1630916855"/>
+      </p:ext>
+    </p:extLst>
+  </p:cSld>
+  <p:clrMap bg1="lt1" tx1="dk1" bg2="lt2" tx2="dk2" accent1="accent1" accent2="accent2" accent3="accent3" accent4="accent4" accent5="accent5" accent6="accent6" hlink="hlink" folHlink="folHlink"/>
+  <p:notesStyle>
+    <a:lvl1pPr marL="0" algn="l" defTabSz="914400" rtl="0" eaLnBrk="1" latinLnBrk="0" hangingPunct="1">
+      <a:defRPr sz="1200" kern="1200">
+        <a:solidFill>
+          <a:schemeClr val="tx1"/>
+        </a:solidFill>
+        <a:latin typeface="+mn-lt"/>
+        <a:ea typeface="+mn-ea"/>
+        <a:cs typeface="+mn-cs"/>
+      </a:defRPr>
+    </a:lvl1pPr>
+    <a:lvl2pPr marL="457200" algn="l" defTabSz="914400" rtl="0" eaLnBrk="1" latinLnBrk="0" hangingPunct="1">
+      <a:defRPr sz="1200" kern="1200">
+        <a:solidFill>
+          <a:schemeClr val="tx1"/>
+        </a:solidFill>
+        <a:latin typeface="+mn-lt"/>
+        <a:ea typeface="+mn-ea"/>
+        <a:cs typeface="+mn-cs"/>
+      </a:defRPr>
+    </a:lvl2pPr>
+    <a:lvl3pPr marL="914400" algn="l" defTabSz="914400" rtl="0" eaLnBrk="1" latinLnBrk="0" hangingPunct="1">
+      <a:defRPr sz="1200" kern="1200">
+        <a:solidFill>
+          <a:schemeClr val="tx1"/>
+        </a:solidFill>
+        <a:latin typeface="+mn-lt"/>
+        <a:ea typeface="+mn-ea"/>
+        <a:cs typeface="+mn-cs"/>
+      </a:defRPr>
+    </a:lvl3pPr>
+    <a:lvl4pPr marL="1371600" algn="l" defTabSz="914400" rtl="0" eaLnBrk="1" latinLnBrk="0" hangingPunct="1">
+      <a:defRPr sz="1200" kern="1200">
+        <a:solidFill>
+          <a:schemeClr val="tx1"/>
+        </a:solidFill>
+        <a:latin typeface="+mn-lt"/>
+        <a:ea typeface="+mn-ea"/>
+        <a:cs typeface="+mn-cs"/>
+      </a:defRPr>
+    </a:lvl4pPr>
+    <a:lvl5pPr marL="1828800" algn="l" defTabSz="914400" rtl="0" eaLnBrk="1" latinLnBrk="0" hangingPunct="1">
+      <a:defRPr sz="1200" kern="1200">
+        <a:solidFill>
+          <a:schemeClr val="tx1"/>
+        </a:solidFill>
+        <a:latin typeface="+mn-lt"/>
+        <a:ea typeface="+mn-ea"/>
+        <a:cs typeface="+mn-cs"/>
+      </a:defRPr>
+    </a:lvl5pPr>
+    <a:lvl6pPr marL="2286000" algn="l" defTabSz="914400" rtl="0" eaLnBrk="1" latinLnBrk="0" hangingPunct="1">
+      <a:defRPr sz="1200" kern="1200">
+        <a:solidFill>
+          <a:schemeClr val="tx1"/>
+        </a:solidFill>
+        <a:latin typeface="+mn-lt"/>
+        <a:ea typeface="+mn-ea"/>
+        <a:cs typeface="+mn-cs"/>
+      </a:defRPr>
+    </a:lvl6pPr>
+    <a:lvl7pPr marL="2743200" algn="l" defTabSz="914400" rtl="0" eaLnBrk="1" latinLnBrk="0" hangingPunct="1">
+      <a:defRPr sz="1200" kern="1200">
+        <a:solidFill>
+          <a:schemeClr val="tx1"/>
+        </a:solidFill>
+        <a:latin typeface="+mn-lt"/>
+        <a:ea typeface="+mn-ea"/>
+        <a:cs typeface="+mn-cs"/>
+      </a:defRPr>
+    </a:lvl7pPr>
+    <a:lvl8pPr marL="3200400" algn="l" defTabSz="914400" rtl="0" eaLnBrk="1" latinLnBrk="0" hangingPunct="1">
+      <a:defRPr sz="1200" kern="1200">
+        <a:solidFill>
+          <a:schemeClr val="tx1"/>
+        </a:solidFill>
+        <a:latin typeface="+mn-lt"/>
+        <a:ea typeface="+mn-ea"/>
+        <a:cs typeface="+mn-cs"/>
+      </a:defRPr>
+    </a:lvl8pPr>
+    <a:lvl9pPr marL="3657600" algn="l" defTabSz="914400" rtl="0" eaLnBrk="1" latinLnBrk="0" hangingPunct="1">
+      <a:defRPr sz="1200" kern="1200">
+        <a:solidFill>
+          <a:schemeClr val="tx1"/>
+        </a:solidFill>
+        <a:latin typeface="+mn-lt"/>
+        <a:ea typeface="+mn-ea"/>
+        <a:cs typeface="+mn-cs"/>
+      </a:defRPr>
+    </a:lvl9pPr>
+  </p:notesStyle>
+</p:notesMaster>
+</file>
+
+<file path=ppt/notesSlides/notesSlide1.xml><?xml version="1.0" encoding="utf-8"?>
+<p:notes xmlns:a="http://schemas.openxmlformats.org/drawingml/2006/main" xmlns:r="http://schemas.openxmlformats.org/officeDocument/2006/relationships" xmlns:p="http://schemas.openxmlformats.org/presentationml/2006/main">
+  <p:cSld>
+    <p:spTree>
+      <p:nvGrpSpPr>
+        <p:cNvPr id="1" name=""/>
+        <p:cNvGrpSpPr/>
+        <p:nvPr/>
+      </p:nvGrpSpPr>
+      <p:grpSpPr>
+        <a:xfrm>
+          <a:off x="0" y="0"/>
+          <a:ext cx="0" cy="0"/>
+          <a:chOff x="0" y="0"/>
+          <a:chExt cx="0" cy="0"/>
+        </a:xfrm>
+      </p:grpSpPr>
+      <p:sp>
+        <p:nvSpPr>
+          <p:cNvPr id="2" name="Slide Image Placeholder 1"/>
+          <p:cNvSpPr>
+            <a:spLocks noGrp="1" noRot="1" noChangeAspect="1"/>
+          </p:cNvSpPr>
+          <p:nvPr>
+            <p:ph type="sldImg"/>
+          </p:nvPr>
+        </p:nvSpPr>
+        <p:spPr/>
+      </p:sp>
+      <p:sp>
+        <p:nvSpPr>
+          <p:cNvPr id="3" name="Notes Placeholder 2"/>
+          <p:cNvSpPr>
+            <a:spLocks noGrp="1"/>
+          </p:cNvSpPr>
+          <p:nvPr>
+            <p:ph type="body" idx="1"/>
+          </p:nvPr>
+        </p:nvSpPr>
+        <p:spPr/>
+        <p:txBody>
+          <a:bodyPr/>
+          <a:lstStyle/>
+          <a:p>
+            <a:pPr marL="0" marR="0" algn="just">
+              <a:lnSpc>
+                <a:spcPct val="115000"/>
+              </a:lnSpc>
+              <a:spcAft>
+                <a:spcPts val="800"/>
+              </a:spcAft>
+              <a:buNone/>
+            </a:pPr>
+            <a:r>
+              <a:rPr lang="en-US" sz="1200" b="1" kern="100" dirty="0">
+                <a:effectLst/>
+                <a:latin typeface="Arial" panose="020B0604020202020204" pitchFamily="34" charset="0"/>
+                <a:ea typeface="Aptos" panose="020B0004020202020204" pitchFamily="34" charset="0"/>
+                <a:cs typeface="Arial" panose="020B0604020202020204" pitchFamily="34" charset="0"/>
+              </a:rPr>
+              <a:t>Possible model scenarios under potential revised structure:</a:t>
+            </a:r>
+            <a:r>
+              <a:rPr lang="en-US" sz="1200" kern="100" dirty="0">
+                <a:effectLst/>
+                <a:latin typeface="Arial" panose="020B0604020202020204" pitchFamily="34" charset="0"/>
+                <a:ea typeface="Aptos" panose="020B0004020202020204" pitchFamily="34" charset="0"/>
+                <a:cs typeface="Arial" panose="020B0604020202020204" pitchFamily="34" charset="0"/>
+              </a:rPr>
+              <a:t> If there is interest in more complex analyses, we could possibly make custom changes to the model structure; for example, adding a separate compartment to specify those who are on LAI ART (see figure below). This would allow those individuals to retain their suppression for a longer period because LAI would not be subject to disengagement rate (or a much lower disengagement rate). With this new structure, we could model the following scenarios (mirroring the cohorts used in the </a:t>
+            </a:r>
+            <a:r>
+              <a:rPr lang="en-US" sz="1200" kern="100" dirty="0" err="1">
+                <a:effectLst/>
+                <a:latin typeface="Arial" panose="020B0604020202020204" pitchFamily="34" charset="0"/>
+                <a:ea typeface="Aptos" panose="020B0004020202020204" pitchFamily="34" charset="0"/>
+                <a:cs typeface="Arial" panose="020B0604020202020204" pitchFamily="34" charset="0"/>
+              </a:rPr>
+              <a:t>AFINAty</a:t>
+            </a:r>
+            <a:r>
+              <a:rPr lang="en-US" sz="1200" kern="100" dirty="0">
+                <a:effectLst/>
+                <a:latin typeface="Arial" panose="020B0604020202020204" pitchFamily="34" charset="0"/>
+                <a:ea typeface="Aptos" panose="020B0004020202020204" pitchFamily="34" charset="0"/>
+                <a:cs typeface="Arial" panose="020B0604020202020204" pitchFamily="34" charset="0"/>
+              </a:rPr>
+              <a:t> study): </a:t>
+            </a:r>
+            <a:endParaRPr lang="en-US" sz="1200" kern="100" dirty="0">
+              <a:effectLst/>
+              <a:latin typeface="Aptos" panose="020B0004020202020204" pitchFamily="34" charset="0"/>
+              <a:ea typeface="Aptos" panose="020B0004020202020204" pitchFamily="34" charset="0"/>
+              <a:cs typeface="Arial" panose="020B0604020202020204" pitchFamily="34" charset="0"/>
+            </a:endParaRPr>
+          </a:p>
+          <a:p>
+            <a:pPr marL="342900" marR="0" lvl="0" indent="-342900" algn="just">
+              <a:lnSpc>
+                <a:spcPct val="115000"/>
+              </a:lnSpc>
+              <a:spcAft>
+                <a:spcPts val="800"/>
+              </a:spcAft>
+              <a:buSzPts val="1000"/>
+              <a:buFont typeface="+mj-lt"/>
+              <a:buAutoNum type="arabicPeriod"/>
+            </a:pPr>
+            <a:r>
+              <a:rPr lang="en-US" sz="1200" kern="100" dirty="0">
+                <a:effectLst/>
+                <a:latin typeface="Arial" panose="020B0604020202020204" pitchFamily="34" charset="0"/>
+                <a:ea typeface="Aptos" panose="020B0004020202020204" pitchFamily="34" charset="0"/>
+                <a:cs typeface="Arial" panose="020B0604020202020204" pitchFamily="34" charset="0"/>
+              </a:rPr>
+              <a:t>Cohort 1: Offering LAI to those who are virally suppressed (purple arrow 7 below)</a:t>
+            </a:r>
+            <a:endParaRPr lang="en-US" sz="1200" kern="100" dirty="0">
+              <a:effectLst/>
+              <a:latin typeface="Aptos" panose="020B0004020202020204" pitchFamily="34" charset="0"/>
+              <a:ea typeface="Aptos" panose="020B0004020202020204" pitchFamily="34" charset="0"/>
+              <a:cs typeface="Arial" panose="020B0604020202020204" pitchFamily="34" charset="0"/>
+            </a:endParaRPr>
+          </a:p>
+          <a:p>
+            <a:pPr marL="342900" marR="0" lvl="0" indent="-342900" algn="just">
+              <a:lnSpc>
+                <a:spcPct val="115000"/>
+              </a:lnSpc>
+              <a:spcAft>
+                <a:spcPts val="800"/>
+              </a:spcAft>
+              <a:buSzPts val="1000"/>
+              <a:buFont typeface="+mj-lt"/>
+              <a:buAutoNum type="arabicPeriod"/>
+            </a:pPr>
+            <a:r>
+              <a:rPr lang="en-US" sz="1200" kern="100" dirty="0">
+                <a:effectLst/>
+                <a:latin typeface="Arial" panose="020B0604020202020204" pitchFamily="34" charset="0"/>
+                <a:ea typeface="Aptos" panose="020B0004020202020204" pitchFamily="34" charset="0"/>
+                <a:cs typeface="Arial" panose="020B0604020202020204" pitchFamily="34" charset="0"/>
+              </a:rPr>
+              <a:t>Cohort 2: Offering LAI to those unsuppressed but engaged (orange arrow 8 below)</a:t>
+            </a:r>
+            <a:endParaRPr lang="en-US" sz="1200" kern="100" dirty="0">
+              <a:effectLst/>
+              <a:latin typeface="Aptos" panose="020B0004020202020204" pitchFamily="34" charset="0"/>
+              <a:ea typeface="Aptos" panose="020B0004020202020204" pitchFamily="34" charset="0"/>
+              <a:cs typeface="Arial" panose="020B0604020202020204" pitchFamily="34" charset="0"/>
+            </a:endParaRPr>
+          </a:p>
+          <a:p>
+            <a:pPr marL="342900" marR="0" lvl="0" indent="-342900" algn="just">
+              <a:lnSpc>
+                <a:spcPct val="115000"/>
+              </a:lnSpc>
+              <a:spcAft>
+                <a:spcPts val="800"/>
+              </a:spcAft>
+              <a:buSzPts val="1000"/>
+              <a:buFont typeface="+mj-lt"/>
+              <a:buAutoNum type="arabicPeriod"/>
+            </a:pPr>
+            <a:r>
+              <a:rPr lang="en-US" sz="1200" kern="100" dirty="0">
+                <a:effectLst/>
+                <a:latin typeface="Arial" panose="020B0604020202020204" pitchFamily="34" charset="0"/>
+                <a:ea typeface="Aptos" panose="020B0004020202020204" pitchFamily="34" charset="0"/>
+                <a:cs typeface="Arial" panose="020B0604020202020204" pitchFamily="34" charset="0"/>
+              </a:rPr>
+              <a:t>Cohort 3: Offering LAI to ART naïve (green arrow 9 below)</a:t>
+            </a:r>
+            <a:endParaRPr lang="en-US" sz="1200" kern="100" dirty="0">
+              <a:effectLst/>
+              <a:latin typeface="Aptos" panose="020B0004020202020204" pitchFamily="34" charset="0"/>
+              <a:ea typeface="Aptos" panose="020B0004020202020204" pitchFamily="34" charset="0"/>
+              <a:cs typeface="Arial" panose="020B0604020202020204" pitchFamily="34" charset="0"/>
+            </a:endParaRPr>
+          </a:p>
+          <a:p>
+            <a:pPr marL="171450" lvl="0" indent="-171450">
+              <a:buFontTx/>
+              <a:buChar char="-"/>
+            </a:pPr>
+            <a:endParaRPr lang="en-US" dirty="0"/>
+          </a:p>
+          <a:p>
+            <a:endParaRPr lang="en-US" dirty="0"/>
+          </a:p>
+        </p:txBody>
+      </p:sp>
+      <p:sp>
+        <p:nvSpPr>
+          <p:cNvPr id="4" name="Slide Number Placeholder 3"/>
+          <p:cNvSpPr>
+            <a:spLocks noGrp="1"/>
+          </p:cNvSpPr>
+          <p:nvPr>
+            <p:ph type="sldNum" sz="quarter" idx="5"/>
+          </p:nvPr>
+        </p:nvSpPr>
+        <p:spPr/>
+        <p:txBody>
+          <a:bodyPr/>
+          <a:lstStyle/>
+          <a:p>
+            <a:fld id="{98940DD7-8C6B-064B-A1A5-5415C68B51F1}" type="slidenum">
+              <a:rPr lang="en-US" smtClean="0"/>
+              <a:t>4</a:t>
+            </a:fld>
+            <a:endParaRPr lang="en-US"/>
+          </a:p>
+        </p:txBody>
+      </p:sp>
+    </p:spTree>
+    <p:extLst>
+      <p:ext uri="{BB962C8B-B14F-4D97-AF65-F5344CB8AC3E}">
+        <p14:creationId xmlns:p14="http://schemas.microsoft.com/office/powerpoint/2010/main" val="1736156371"/>
+      </p:ext>
+    </p:extLst>
+  </p:cSld>
+  <p:clrMapOvr>
+    <a:masterClrMapping/>
+  </p:clrMapOvr>
+</p:notes>
+</file>
+
 <file path=ppt/slideLayouts/slideLayout1.xml><?xml version="1.0" encoding="utf-8"?>
 <p:sldLayout xmlns:a="http://schemas.openxmlformats.org/drawingml/2006/main" xmlns:r="http://schemas.openxmlformats.org/officeDocument/2006/relationships" xmlns:p="http://schemas.openxmlformats.org/presentationml/2006/main" type="title" preserve="1">
   <p:cSld name="Title Slide">
@@ -261,7 +842,7 @@
           <a:p>
             <a:fld id="{13EE376D-FD4B-0B44-ADA7-9A16B8AB0BAD}" type="datetimeFigureOut">
               <a:rPr lang="en-US" smtClean="0"/>
-              <a:t>6/26/25</a:t>
+              <a:t>6/3/26</a:t>
             </a:fld>
             <a:endParaRPr lang="en-US"/>
           </a:p>
@@ -459,7 +1040,7 @@
           <a:p>
             <a:fld id="{13EE376D-FD4B-0B44-ADA7-9A16B8AB0BAD}" type="datetimeFigureOut">
               <a:rPr lang="en-US" smtClean="0"/>
-              <a:t>6/26/25</a:t>
+              <a:t>6/3/26</a:t>
             </a:fld>
             <a:endParaRPr lang="en-US"/>
           </a:p>
@@ -667,7 +1248,7 @@
           <a:p>
             <a:fld id="{13EE376D-FD4B-0B44-ADA7-9A16B8AB0BAD}" type="datetimeFigureOut">
               <a:rPr lang="en-US" smtClean="0"/>
-              <a:t>6/26/25</a:t>
+              <a:t>6/3/26</a:t>
             </a:fld>
             <a:endParaRPr lang="en-US"/>
           </a:p>
@@ -731,6 +1312,219 @@
     <p:extLst>
       <p:ext uri="{BB962C8B-B14F-4D97-AF65-F5344CB8AC3E}">
         <p14:creationId xmlns:p14="http://schemas.microsoft.com/office/powerpoint/2010/main" val="2133733803"/>
+      </p:ext>
+    </p:extLst>
+  </p:cSld>
+  <p:clrMapOvr>
+    <a:masterClrMapping/>
+  </p:clrMapOvr>
+</p:sldLayout>
+</file>
+
+<file path=ppt/slideLayouts/slideLayout12.xml><?xml version="1.0" encoding="utf-8"?>
+<p:sldLayout xmlns:a="http://schemas.openxmlformats.org/drawingml/2006/main" xmlns:r="http://schemas.openxmlformats.org/officeDocument/2006/relationships" xmlns:p="http://schemas.openxmlformats.org/presentationml/2006/main" userDrawn="1">
+  <p:cSld name="One Column 3">
+    <p:bg>
+      <p:bgPr>
+        <a:solidFill>
+          <a:schemeClr val="bg1"/>
+        </a:solidFill>
+        <a:effectLst/>
+      </p:bgPr>
+    </p:bg>
+    <p:spTree>
+      <p:nvGrpSpPr>
+        <p:cNvPr id="1" name=""/>
+        <p:cNvGrpSpPr/>
+        <p:nvPr/>
+      </p:nvGrpSpPr>
+      <p:grpSpPr>
+        <a:xfrm>
+          <a:off x="0" y="0"/>
+          <a:ext cx="0" cy="0"/>
+          <a:chOff x="0" y="0"/>
+          <a:chExt cx="0" cy="0"/>
+        </a:xfrm>
+      </p:grpSpPr>
+      <p:sp>
+        <p:nvSpPr>
+          <p:cNvPr id="20" name="Text Placeholder 19"/>
+          <p:cNvSpPr>
+            <a:spLocks noGrp="1"/>
+          </p:cNvSpPr>
+          <p:nvPr>
+            <p:ph type="body" sz="quarter" idx="10" hasCustomPrompt="1"/>
+          </p:nvPr>
+        </p:nvSpPr>
+        <p:spPr>
+          <a:xfrm>
+            <a:off x="768096" y="365769"/>
+            <a:ext cx="10811280" cy="832559"/>
+          </a:xfrm>
+          <a:prstGeom prst="rect">
+            <a:avLst/>
+          </a:prstGeom>
+        </p:spPr>
+        <p:txBody>
+          <a:bodyPr vert="horz"/>
+          <a:lstStyle>
+            <a:lvl1pPr algn="l">
+              <a:buNone/>
+              <a:defRPr sz="4100">
+                <a:solidFill>
+                  <a:schemeClr val="tx2"/>
+                </a:solidFill>
+                <a:latin typeface="Helvetica" pitchFamily="2" charset="0"/>
+                <a:cs typeface="Helvetica" pitchFamily="2" charset="0"/>
+              </a:defRPr>
+            </a:lvl1pPr>
+          </a:lstStyle>
+          <a:p>
+            <a:pPr lvl="0"/>
+            <a:r>
+              <a:rPr lang="en-US" dirty="0"/>
+              <a:t>Slide Header</a:t>
+            </a:r>
+          </a:p>
+        </p:txBody>
+      </p:sp>
+      <p:sp>
+        <p:nvSpPr>
+          <p:cNvPr id="15" name="Rectangle 14"/>
+          <p:cNvSpPr/>
+          <p:nvPr userDrawn="1"/>
+        </p:nvSpPr>
+        <p:spPr>
+          <a:xfrm>
+            <a:off x="0" y="6400800"/>
+            <a:ext cx="12192000" cy="457200"/>
+          </a:xfrm>
+          <a:prstGeom prst="rect">
+            <a:avLst/>
+          </a:prstGeom>
+          <a:solidFill>
+            <a:schemeClr val="tx2"/>
+          </a:solidFill>
+          <a:effectLst/>
+        </p:spPr>
+        <p:style>
+          <a:lnRef idx="1">
+            <a:schemeClr val="accent1"/>
+          </a:lnRef>
+          <a:fillRef idx="3">
+            <a:schemeClr val="accent1"/>
+          </a:fillRef>
+          <a:effectRef idx="2">
+            <a:schemeClr val="accent1"/>
+          </a:effectRef>
+          <a:fontRef idx="minor">
+            <a:schemeClr val="lt1"/>
+          </a:fontRef>
+        </p:style>
+        <p:txBody>
+          <a:bodyPr rtlCol="0" anchor="ctr"/>
+          <a:lstStyle/>
+          <a:p>
+            <a:pPr algn="ctr"/>
+            <a:endParaRPr lang="en-US" sz="1800" dirty="0">
+              <a:ln>
+                <a:solidFill>
+                  <a:schemeClr val="accent1"/>
+                </a:solidFill>
+              </a:ln>
+              <a:solidFill>
+                <a:schemeClr val="accent1"/>
+              </a:solidFill>
+              <a:latin typeface="Helvetica" pitchFamily="2" charset="0"/>
+            </a:endParaRPr>
+          </a:p>
+        </p:txBody>
+      </p:sp>
+      <p:sp>
+        <p:nvSpPr>
+          <p:cNvPr id="9" name="Text Placeholder 12"/>
+          <p:cNvSpPr>
+            <a:spLocks noGrp="1"/>
+          </p:cNvSpPr>
+          <p:nvPr>
+            <p:ph type="body" sz="quarter" idx="13" hasCustomPrompt="1"/>
+          </p:nvPr>
+        </p:nvSpPr>
+        <p:spPr>
+          <a:xfrm>
+            <a:off x="768096" y="1371600"/>
+            <a:ext cx="10811280" cy="4242816"/>
+          </a:xfrm>
+          <a:prstGeom prst="rect">
+            <a:avLst/>
+          </a:prstGeom>
+        </p:spPr>
+        <p:txBody>
+          <a:bodyPr vert="horz"/>
+          <a:lstStyle>
+            <a:lvl1pPr marL="0" indent="0">
+              <a:spcBef>
+                <a:spcPts val="0"/>
+              </a:spcBef>
+              <a:buNone/>
+              <a:defRPr sz="1600" baseline="0">
+                <a:solidFill>
+                  <a:schemeClr val="accent5"/>
+                </a:solidFill>
+                <a:latin typeface="Helvetica" pitchFamily="2" charset="0"/>
+                <a:cs typeface="Tahoma"/>
+              </a:defRPr>
+            </a:lvl1pPr>
+            <a:lvl2pPr>
+              <a:defRPr sz="1600">
+                <a:solidFill>
+                  <a:schemeClr val="accent4"/>
+                </a:solidFill>
+                <a:latin typeface="Tahoma"/>
+                <a:cs typeface="Tahoma"/>
+              </a:defRPr>
+            </a:lvl2pPr>
+            <a:lvl3pPr>
+              <a:defRPr sz="1600">
+                <a:solidFill>
+                  <a:schemeClr val="accent4"/>
+                </a:solidFill>
+                <a:latin typeface="Tahoma"/>
+                <a:cs typeface="Tahoma"/>
+              </a:defRPr>
+            </a:lvl3pPr>
+            <a:lvl4pPr>
+              <a:defRPr sz="1600">
+                <a:solidFill>
+                  <a:schemeClr val="accent4"/>
+                </a:solidFill>
+                <a:latin typeface="Tahoma"/>
+                <a:cs typeface="Tahoma"/>
+              </a:defRPr>
+            </a:lvl4pPr>
+            <a:lvl5pPr>
+              <a:defRPr sz="1600">
+                <a:solidFill>
+                  <a:schemeClr val="accent4"/>
+                </a:solidFill>
+                <a:latin typeface="Tahoma"/>
+                <a:cs typeface="Tahoma"/>
+              </a:defRPr>
+            </a:lvl5pPr>
+          </a:lstStyle>
+          <a:p>
+            <a:pPr lvl="0"/>
+            <a:r>
+              <a:rPr lang="en-US" dirty="0"/>
+              <a:t>Copy here</a:t>
+            </a:r>
+          </a:p>
+        </p:txBody>
+      </p:sp>
+    </p:spTree>
+    <p:extLst>
+      <p:ext uri="{BB962C8B-B14F-4D97-AF65-F5344CB8AC3E}">
+        <p14:creationId xmlns:p14="http://schemas.microsoft.com/office/powerpoint/2010/main" val="1623959138"/>
       </p:ext>
     </p:extLst>
   </p:cSld>
@@ -865,7 +1659,7 @@
           <a:p>
             <a:fld id="{13EE376D-FD4B-0B44-ADA7-9A16B8AB0BAD}" type="datetimeFigureOut">
               <a:rPr lang="en-US" smtClean="0"/>
-              <a:t>6/26/25</a:t>
+              <a:t>6/3/26</a:t>
             </a:fld>
             <a:endParaRPr lang="en-US"/>
           </a:p>
@@ -1140,7 +1934,7 @@
           <a:p>
             <a:fld id="{13EE376D-FD4B-0B44-ADA7-9A16B8AB0BAD}" type="datetimeFigureOut">
               <a:rPr lang="en-US" smtClean="0"/>
-              <a:t>6/26/25</a:t>
+              <a:t>6/3/26</a:t>
             </a:fld>
             <a:endParaRPr lang="en-US"/>
           </a:p>
@@ -1405,7 +2199,7 @@
           <a:p>
             <a:fld id="{13EE376D-FD4B-0B44-ADA7-9A16B8AB0BAD}" type="datetimeFigureOut">
               <a:rPr lang="en-US" smtClean="0"/>
-              <a:t>6/26/25</a:t>
+              <a:t>6/3/26</a:t>
             </a:fld>
             <a:endParaRPr lang="en-US"/>
           </a:p>
@@ -1817,7 +2611,7 @@
           <a:p>
             <a:fld id="{13EE376D-FD4B-0B44-ADA7-9A16B8AB0BAD}" type="datetimeFigureOut">
               <a:rPr lang="en-US" smtClean="0"/>
-              <a:t>6/26/25</a:t>
+              <a:t>6/3/26</a:t>
             </a:fld>
             <a:endParaRPr lang="en-US"/>
           </a:p>
@@ -1958,7 +2752,7 @@
           <a:p>
             <a:fld id="{13EE376D-FD4B-0B44-ADA7-9A16B8AB0BAD}" type="datetimeFigureOut">
               <a:rPr lang="en-US" smtClean="0"/>
-              <a:t>6/26/25</a:t>
+              <a:t>6/3/26</a:t>
             </a:fld>
             <a:endParaRPr lang="en-US"/>
           </a:p>
@@ -2071,7 +2865,7 @@
           <a:p>
             <a:fld id="{13EE376D-FD4B-0B44-ADA7-9A16B8AB0BAD}" type="datetimeFigureOut">
               <a:rPr lang="en-US" smtClean="0"/>
-              <a:t>6/26/25</a:t>
+              <a:t>6/3/26</a:t>
             </a:fld>
             <a:endParaRPr lang="en-US"/>
           </a:p>
@@ -2382,7 +3176,7 @@
           <a:p>
             <a:fld id="{13EE376D-FD4B-0B44-ADA7-9A16B8AB0BAD}" type="datetimeFigureOut">
               <a:rPr lang="en-US" smtClean="0"/>
-              <a:t>6/26/25</a:t>
+              <a:t>6/3/26</a:t>
             </a:fld>
             <a:endParaRPr lang="en-US"/>
           </a:p>
@@ -2670,7 +3464,7 @@
           <a:p>
             <a:fld id="{13EE376D-FD4B-0B44-ADA7-9A16B8AB0BAD}" type="datetimeFigureOut">
               <a:rPr lang="en-US" smtClean="0"/>
-              <a:t>6/26/25</a:t>
+              <a:t>6/3/26</a:t>
             </a:fld>
             <a:endParaRPr lang="en-US"/>
           </a:p>
@@ -2911,7 +3705,7 @@
           <a:p>
             <a:fld id="{13EE376D-FD4B-0B44-ADA7-9A16B8AB0BAD}" type="datetimeFigureOut">
               <a:rPr lang="en-US" smtClean="0"/>
-              <a:t>6/26/25</a:t>
+              <a:t>6/3/26</a:t>
             </a:fld>
             <a:endParaRPr lang="en-US"/>
           </a:p>
@@ -3027,6 +3821,7 @@
     <p:sldLayoutId id="2147483657" r:id="rId9"/>
     <p:sldLayoutId id="2147483658" r:id="rId10"/>
     <p:sldLayoutId id="2147483659" r:id="rId11"/>
+    <p:sldLayoutId id="2147483660" r:id="rId12"/>
   </p:sldLayoutIdLst>
   <p:txStyles>
     <p:titleStyle>
@@ -9213,6 +10008,2012 @@
 </p:sld>
 </file>
 
+<file path=ppt/slides/slide4.xml><?xml version="1.0" encoding="utf-8"?>
+<p:sld xmlns:a="http://schemas.openxmlformats.org/drawingml/2006/main" xmlns:r="http://schemas.openxmlformats.org/officeDocument/2006/relationships" xmlns:p="http://schemas.openxmlformats.org/presentationml/2006/main">
+  <p:cSld>
+    <p:spTree>
+      <p:nvGrpSpPr>
+        <p:cNvPr id="1" name="">
+          <a:extLst>
+            <a:ext uri="{FF2B5EF4-FFF2-40B4-BE49-F238E27FC236}">
+              <a16:creationId xmlns:a16="http://schemas.microsoft.com/office/drawing/2014/main" id="{78D1F6B4-B310-607F-9CD6-B39F817FE85B}"/>
+            </a:ext>
+          </a:extLst>
+        </p:cNvPr>
+        <p:cNvGrpSpPr/>
+        <p:nvPr/>
+      </p:nvGrpSpPr>
+      <p:grpSpPr>
+        <a:xfrm>
+          <a:off x="0" y="0"/>
+          <a:ext cx="0" cy="0"/>
+          <a:chOff x="0" y="0"/>
+          <a:chExt cx="0" cy="0"/>
+        </a:xfrm>
+      </p:grpSpPr>
+      <p:cxnSp>
+        <p:nvCxnSpPr>
+          <p:cNvPr id="8" name="Straight Arrow Connector 7">
+            <a:extLst>
+              <a:ext uri="{FF2B5EF4-FFF2-40B4-BE49-F238E27FC236}">
+                <a16:creationId xmlns:a16="http://schemas.microsoft.com/office/drawing/2014/main" id="{C53CE0FE-B050-C7D6-270A-CEB49BBA4048}"/>
+              </a:ext>
+            </a:extLst>
+          </p:cNvPr>
+          <p:cNvCxnSpPr>
+            <a:cxnSpLocks/>
+          </p:cNvCxnSpPr>
+          <p:nvPr/>
+        </p:nvCxnSpPr>
+        <p:spPr>
+          <a:xfrm>
+            <a:off x="5960470" y="2528937"/>
+            <a:ext cx="3687408" cy="1332056"/>
+          </a:xfrm>
+          <a:prstGeom prst="straightConnector1">
+            <a:avLst/>
+          </a:prstGeom>
+          <a:noFill/>
+          <a:ln w="38100" cap="flat" cmpd="sng" algn="ctr">
+            <a:solidFill>
+              <a:srgbClr val="00B050"/>
+            </a:solidFill>
+            <a:prstDash val="solid"/>
+            <a:tailEnd type="triangle" w="lg" len="med"/>
+          </a:ln>
+          <a:effectLst/>
+        </p:spPr>
+      </p:cxnSp>
+      <p:cxnSp>
+        <p:nvCxnSpPr>
+          <p:cNvPr id="6" name="Straight Arrow Connector 5">
+            <a:extLst>
+              <a:ext uri="{FF2B5EF4-FFF2-40B4-BE49-F238E27FC236}">
+                <a16:creationId xmlns:a16="http://schemas.microsoft.com/office/drawing/2014/main" id="{FE0C9516-2592-492D-6D25-88FA935E95EC}"/>
+              </a:ext>
+            </a:extLst>
+          </p:cNvPr>
+          <p:cNvCxnSpPr>
+            <a:cxnSpLocks/>
+          </p:cNvCxnSpPr>
+          <p:nvPr/>
+        </p:nvCxnSpPr>
+        <p:spPr>
+          <a:xfrm>
+            <a:off x="8213940" y="2530435"/>
+            <a:ext cx="1433938" cy="964155"/>
+          </a:xfrm>
+          <a:prstGeom prst="straightConnector1">
+            <a:avLst/>
+          </a:prstGeom>
+          <a:noFill/>
+          <a:ln w="38100" cap="flat" cmpd="sng" algn="ctr">
+            <a:solidFill>
+              <a:schemeClr val="accent2"/>
+            </a:solidFill>
+            <a:prstDash val="solid"/>
+            <a:tailEnd type="triangle" w="lg" len="med"/>
+          </a:ln>
+          <a:effectLst/>
+        </p:spPr>
+      </p:cxnSp>
+      <p:sp>
+        <p:nvSpPr>
+          <p:cNvPr id="4" name="Text Placeholder 1">
+            <a:extLst>
+              <a:ext uri="{FF2B5EF4-FFF2-40B4-BE49-F238E27FC236}">
+                <a16:creationId xmlns:a16="http://schemas.microsoft.com/office/drawing/2014/main" id="{561043DE-FCD9-407E-656B-11C189554B52}"/>
+              </a:ext>
+            </a:extLst>
+          </p:cNvPr>
+          <p:cNvSpPr txBox="1">
+            <a:spLocks/>
+          </p:cNvSpPr>
+          <p:nvPr/>
+        </p:nvSpPr>
+        <p:spPr>
+          <a:xfrm>
+            <a:off x="768096" y="365769"/>
+            <a:ext cx="10668000" cy="832559"/>
+          </a:xfrm>
+          <a:prstGeom prst="rect">
+            <a:avLst/>
+          </a:prstGeom>
+        </p:spPr>
+        <p:txBody>
+          <a:bodyPr vert="horz"/>
+          <a:lstStyle>
+            <a:lvl1pPr marL="342900" indent="-342900" algn="l" defTabSz="457200" rtl="0" eaLnBrk="1" latinLnBrk="0" hangingPunct="1">
+              <a:spcBef>
+                <a:spcPct val="20000"/>
+              </a:spcBef>
+              <a:buFont typeface="Arial"/>
+              <a:buNone/>
+              <a:defRPr sz="4100" kern="1200">
+                <a:solidFill>
+                  <a:schemeClr val="tx1"/>
+                </a:solidFill>
+                <a:latin typeface="Helvetica" pitchFamily="2" charset="0"/>
+                <a:ea typeface="+mn-ea"/>
+                <a:cs typeface="Helvetica" pitchFamily="2" charset="0"/>
+              </a:defRPr>
+            </a:lvl1pPr>
+            <a:lvl2pPr marL="742950" indent="-285750" algn="l" defTabSz="457200" rtl="0" eaLnBrk="1" latinLnBrk="0" hangingPunct="1">
+              <a:spcBef>
+                <a:spcPct val="20000"/>
+              </a:spcBef>
+              <a:buFont typeface="Arial"/>
+              <a:buChar char="–"/>
+              <a:defRPr sz="2800" kern="1200">
+                <a:solidFill>
+                  <a:schemeClr val="tx1"/>
+                </a:solidFill>
+                <a:latin typeface="+mn-lt"/>
+                <a:ea typeface="+mn-ea"/>
+                <a:cs typeface="+mn-cs"/>
+              </a:defRPr>
+            </a:lvl2pPr>
+            <a:lvl3pPr marL="1143000" indent="-228600" algn="l" defTabSz="457200" rtl="0" eaLnBrk="1" latinLnBrk="0" hangingPunct="1">
+              <a:spcBef>
+                <a:spcPct val="20000"/>
+              </a:spcBef>
+              <a:buFont typeface="Arial"/>
+              <a:buChar char="•"/>
+              <a:defRPr sz="2400" kern="1200">
+                <a:solidFill>
+                  <a:schemeClr val="tx1"/>
+                </a:solidFill>
+                <a:latin typeface="+mn-lt"/>
+                <a:ea typeface="+mn-ea"/>
+                <a:cs typeface="+mn-cs"/>
+              </a:defRPr>
+            </a:lvl3pPr>
+            <a:lvl4pPr marL="1600200" indent="-228600" algn="l" defTabSz="457200" rtl="0" eaLnBrk="1" latinLnBrk="0" hangingPunct="1">
+              <a:spcBef>
+                <a:spcPct val="20000"/>
+              </a:spcBef>
+              <a:buFont typeface="Arial"/>
+              <a:buChar char="–"/>
+              <a:defRPr sz="2000" kern="1200">
+                <a:solidFill>
+                  <a:schemeClr val="tx1"/>
+                </a:solidFill>
+                <a:latin typeface="+mn-lt"/>
+                <a:ea typeface="+mn-ea"/>
+                <a:cs typeface="+mn-cs"/>
+              </a:defRPr>
+            </a:lvl4pPr>
+            <a:lvl5pPr marL="2057400" indent="-228600" algn="l" defTabSz="457200" rtl="0" eaLnBrk="1" latinLnBrk="0" hangingPunct="1">
+              <a:spcBef>
+                <a:spcPct val="20000"/>
+              </a:spcBef>
+              <a:buFont typeface="Arial"/>
+              <a:buChar char="»"/>
+              <a:defRPr sz="2000" kern="1200">
+                <a:solidFill>
+                  <a:schemeClr val="tx1"/>
+                </a:solidFill>
+                <a:latin typeface="+mn-lt"/>
+                <a:ea typeface="+mn-ea"/>
+                <a:cs typeface="+mn-cs"/>
+              </a:defRPr>
+            </a:lvl5pPr>
+            <a:lvl6pPr marL="2514600" indent="-228600" algn="l" defTabSz="457200" rtl="0" eaLnBrk="1" latinLnBrk="0" hangingPunct="1">
+              <a:spcBef>
+                <a:spcPct val="20000"/>
+              </a:spcBef>
+              <a:buFont typeface="Arial"/>
+              <a:buChar char="•"/>
+              <a:defRPr sz="2000" kern="1200">
+                <a:solidFill>
+                  <a:schemeClr val="tx1"/>
+                </a:solidFill>
+                <a:latin typeface="+mn-lt"/>
+                <a:ea typeface="+mn-ea"/>
+                <a:cs typeface="+mn-cs"/>
+              </a:defRPr>
+            </a:lvl6pPr>
+            <a:lvl7pPr marL="2971800" indent="-228600" algn="l" defTabSz="457200" rtl="0" eaLnBrk="1" latinLnBrk="0" hangingPunct="1">
+              <a:spcBef>
+                <a:spcPct val="20000"/>
+              </a:spcBef>
+              <a:buFont typeface="Arial"/>
+              <a:buChar char="•"/>
+              <a:defRPr sz="2000" kern="1200">
+                <a:solidFill>
+                  <a:schemeClr val="tx1"/>
+                </a:solidFill>
+                <a:latin typeface="+mn-lt"/>
+                <a:ea typeface="+mn-ea"/>
+                <a:cs typeface="+mn-cs"/>
+              </a:defRPr>
+            </a:lvl7pPr>
+            <a:lvl8pPr marL="3429000" indent="-228600" algn="l" defTabSz="457200" rtl="0" eaLnBrk="1" latinLnBrk="0" hangingPunct="1">
+              <a:spcBef>
+                <a:spcPct val="20000"/>
+              </a:spcBef>
+              <a:buFont typeface="Arial"/>
+              <a:buChar char="•"/>
+              <a:defRPr sz="2000" kern="1200">
+                <a:solidFill>
+                  <a:schemeClr val="tx1"/>
+                </a:solidFill>
+                <a:latin typeface="+mn-lt"/>
+                <a:ea typeface="+mn-ea"/>
+                <a:cs typeface="+mn-cs"/>
+              </a:defRPr>
+            </a:lvl8pPr>
+            <a:lvl9pPr marL="3886200" indent="-228600" algn="l" defTabSz="457200" rtl="0" eaLnBrk="1" latinLnBrk="0" hangingPunct="1">
+              <a:spcBef>
+                <a:spcPct val="20000"/>
+              </a:spcBef>
+              <a:buFont typeface="Arial"/>
+              <a:buChar char="•"/>
+              <a:defRPr sz="2000" kern="1200">
+                <a:solidFill>
+                  <a:schemeClr val="tx1"/>
+                </a:solidFill>
+                <a:latin typeface="+mn-lt"/>
+                <a:ea typeface="+mn-ea"/>
+                <a:cs typeface="+mn-cs"/>
+              </a:defRPr>
+            </a:lvl9pPr>
+          </a:lstStyle>
+          <a:p>
+            <a:pPr lvl="0">
+              <a:defRPr/>
+            </a:pPr>
+            <a:r>
+              <a:rPr lang="en-US" dirty="0">
+                <a:solidFill>
+                  <a:srgbClr val="002D72"/>
+                </a:solidFill>
+              </a:rPr>
+              <a:t>Model structure</a:t>
+            </a:r>
+            <a:endParaRPr kumimoji="0" lang="en-US" sz="4100" b="0" i="0" u="none" strike="noStrike" kern="1200" cap="none" spc="0" normalizeH="0" baseline="0" noProof="0" dirty="0">
+              <a:ln>
+                <a:noFill/>
+              </a:ln>
+              <a:solidFill>
+                <a:srgbClr val="002D72"/>
+              </a:solidFill>
+              <a:effectLst/>
+              <a:uLnTx/>
+              <a:uFillTx/>
+              <a:latin typeface="Helvetica" pitchFamily="2" charset="0"/>
+              <a:ea typeface="+mn-ea"/>
+            </a:endParaRPr>
+          </a:p>
+        </p:txBody>
+      </p:sp>
+      <p:sp>
+        <p:nvSpPr>
+          <p:cNvPr id="9" name="TextBox 8">
+            <a:extLst>
+              <a:ext uri="{FF2B5EF4-FFF2-40B4-BE49-F238E27FC236}">
+                <a16:creationId xmlns:a16="http://schemas.microsoft.com/office/drawing/2014/main" id="{C7492014-E90B-D5A7-1DD2-CA1A5158AFB0}"/>
+              </a:ext>
+            </a:extLst>
+          </p:cNvPr>
+          <p:cNvSpPr txBox="1"/>
+          <p:nvPr/>
+        </p:nvSpPr>
+        <p:spPr>
+          <a:xfrm>
+            <a:off x="2571020" y="1842035"/>
+            <a:ext cx="440691" cy="307777"/>
+          </a:xfrm>
+          <a:prstGeom prst="rect">
+            <a:avLst/>
+          </a:prstGeom>
+          <a:noFill/>
+        </p:spPr>
+        <p:txBody>
+          <a:bodyPr wrap="square" rtlCol="0">
+            <a:spAutoFit/>
+          </a:bodyPr>
+          <a:lstStyle/>
+          <a:p>
+            <a:pPr marL="0" marR="0" lvl="0" indent="0" algn="l" defTabSz="914400" rtl="0" eaLnBrk="1" fontAlgn="auto" latinLnBrk="0" hangingPunct="1">
+              <a:lnSpc>
+                <a:spcPct val="100000"/>
+              </a:lnSpc>
+              <a:spcBef>
+                <a:spcPts val="0"/>
+              </a:spcBef>
+              <a:spcAft>
+                <a:spcPts val="0"/>
+              </a:spcAft>
+              <a:buClrTx/>
+              <a:buSzTx/>
+              <a:buFontTx/>
+              <a:buNone/>
+              <a:tabLst/>
+              <a:defRPr/>
+            </a:pPr>
+            <a:r>
+              <a:rPr kumimoji="0" lang="en-US" sz="1400" b="1" i="0" u="none" strike="noStrike" kern="0" cap="none" spc="0" normalizeH="0" baseline="0" noProof="0" dirty="0">
+                <a:ln>
+                  <a:noFill/>
+                </a:ln>
+                <a:solidFill>
+                  <a:srgbClr val="002D72"/>
+                </a:solidFill>
+                <a:effectLst/>
+                <a:uLnTx/>
+                <a:uFillTx/>
+                <a:latin typeface="Helvetica" pitchFamily="2" charset="0"/>
+                <a:ea typeface="+mn-ea"/>
+                <a:cs typeface="+mn-cs"/>
+              </a:rPr>
+              <a:t>(1)</a:t>
+            </a:r>
+          </a:p>
+        </p:txBody>
+      </p:sp>
+      <p:sp>
+        <p:nvSpPr>
+          <p:cNvPr id="10" name="TextBox 9">
+            <a:extLst>
+              <a:ext uri="{FF2B5EF4-FFF2-40B4-BE49-F238E27FC236}">
+                <a16:creationId xmlns:a16="http://schemas.microsoft.com/office/drawing/2014/main" id="{7E234D16-93CC-7217-CD7E-2C4108E1C0AC}"/>
+              </a:ext>
+            </a:extLst>
+          </p:cNvPr>
+          <p:cNvSpPr txBox="1"/>
+          <p:nvPr/>
+        </p:nvSpPr>
+        <p:spPr>
+          <a:xfrm>
+            <a:off x="4675510" y="1842035"/>
+            <a:ext cx="440691" cy="307777"/>
+          </a:xfrm>
+          <a:prstGeom prst="rect">
+            <a:avLst/>
+          </a:prstGeom>
+          <a:noFill/>
+        </p:spPr>
+        <p:txBody>
+          <a:bodyPr wrap="square" rtlCol="0">
+            <a:spAutoFit/>
+          </a:bodyPr>
+          <a:lstStyle/>
+          <a:p>
+            <a:pPr marL="0" marR="0" lvl="0" indent="0" algn="l" defTabSz="914400" rtl="0" eaLnBrk="1" fontAlgn="auto" latinLnBrk="0" hangingPunct="1">
+              <a:lnSpc>
+                <a:spcPct val="100000"/>
+              </a:lnSpc>
+              <a:spcBef>
+                <a:spcPts val="0"/>
+              </a:spcBef>
+              <a:spcAft>
+                <a:spcPts val="0"/>
+              </a:spcAft>
+              <a:buClrTx/>
+              <a:buSzTx/>
+              <a:buFontTx/>
+              <a:buNone/>
+              <a:tabLst/>
+              <a:defRPr/>
+            </a:pPr>
+            <a:r>
+              <a:rPr kumimoji="0" lang="en-US" sz="1400" b="1" i="0" u="none" strike="noStrike" kern="0" cap="none" spc="0" normalizeH="0" baseline="0" noProof="0" dirty="0">
+                <a:ln>
+                  <a:noFill/>
+                </a:ln>
+                <a:solidFill>
+                  <a:srgbClr val="002D72"/>
+                </a:solidFill>
+                <a:effectLst/>
+                <a:uLnTx/>
+                <a:uFillTx/>
+                <a:latin typeface="Helvetica" pitchFamily="2" charset="0"/>
+                <a:ea typeface="+mn-ea"/>
+                <a:cs typeface="+mn-cs"/>
+              </a:rPr>
+              <a:t>(2)</a:t>
+            </a:r>
+          </a:p>
+        </p:txBody>
+      </p:sp>
+      <p:sp>
+        <p:nvSpPr>
+          <p:cNvPr id="11" name="TextBox 10">
+            <a:extLst>
+              <a:ext uri="{FF2B5EF4-FFF2-40B4-BE49-F238E27FC236}">
+                <a16:creationId xmlns:a16="http://schemas.microsoft.com/office/drawing/2014/main" id="{F1F2DAA9-40DF-A211-0EA6-93039C50F4FE}"/>
+              </a:ext>
+            </a:extLst>
+          </p:cNvPr>
+          <p:cNvSpPr txBox="1"/>
+          <p:nvPr/>
+        </p:nvSpPr>
+        <p:spPr>
+          <a:xfrm>
+            <a:off x="6880390" y="1651980"/>
+            <a:ext cx="440691" cy="307777"/>
+          </a:xfrm>
+          <a:prstGeom prst="rect">
+            <a:avLst/>
+          </a:prstGeom>
+          <a:noFill/>
+        </p:spPr>
+        <p:txBody>
+          <a:bodyPr wrap="square" rtlCol="0">
+            <a:spAutoFit/>
+          </a:bodyPr>
+          <a:lstStyle/>
+          <a:p>
+            <a:pPr marL="0" marR="0" lvl="0" indent="0" algn="l" defTabSz="914400" rtl="0" eaLnBrk="1" fontAlgn="auto" latinLnBrk="0" hangingPunct="1">
+              <a:lnSpc>
+                <a:spcPct val="100000"/>
+              </a:lnSpc>
+              <a:spcBef>
+                <a:spcPts val="0"/>
+              </a:spcBef>
+              <a:spcAft>
+                <a:spcPts val="0"/>
+              </a:spcAft>
+              <a:buClrTx/>
+              <a:buSzTx/>
+              <a:buFontTx/>
+              <a:buNone/>
+              <a:tabLst/>
+              <a:defRPr/>
+            </a:pPr>
+            <a:r>
+              <a:rPr kumimoji="0" lang="en-US" sz="1400" b="1" i="0" u="none" strike="noStrike" kern="0" cap="none" spc="0" normalizeH="0" baseline="0" noProof="0" dirty="0">
+                <a:ln>
+                  <a:noFill/>
+                </a:ln>
+                <a:solidFill>
+                  <a:srgbClr val="002D72"/>
+                </a:solidFill>
+                <a:effectLst/>
+                <a:uLnTx/>
+                <a:uFillTx/>
+                <a:latin typeface="Helvetica" pitchFamily="2" charset="0"/>
+                <a:ea typeface="+mn-ea"/>
+                <a:cs typeface="+mn-cs"/>
+              </a:rPr>
+              <a:t>(3)</a:t>
+            </a:r>
+          </a:p>
+        </p:txBody>
+      </p:sp>
+      <p:sp>
+        <p:nvSpPr>
+          <p:cNvPr id="12" name="TextBox 11">
+            <a:extLst>
+              <a:ext uri="{FF2B5EF4-FFF2-40B4-BE49-F238E27FC236}">
+                <a16:creationId xmlns:a16="http://schemas.microsoft.com/office/drawing/2014/main" id="{B34CFE61-9153-BA3A-59D9-45DD1955E589}"/>
+              </a:ext>
+            </a:extLst>
+          </p:cNvPr>
+          <p:cNvSpPr txBox="1"/>
+          <p:nvPr/>
+        </p:nvSpPr>
+        <p:spPr>
+          <a:xfrm>
+            <a:off x="6880390" y="2263248"/>
+            <a:ext cx="440691" cy="307777"/>
+          </a:xfrm>
+          <a:prstGeom prst="rect">
+            <a:avLst/>
+          </a:prstGeom>
+          <a:noFill/>
+        </p:spPr>
+        <p:txBody>
+          <a:bodyPr wrap="square" rtlCol="0">
+            <a:spAutoFit/>
+          </a:bodyPr>
+          <a:lstStyle/>
+          <a:p>
+            <a:pPr marL="0" marR="0" lvl="0" indent="0" algn="l" defTabSz="914400" rtl="0" eaLnBrk="1" fontAlgn="auto" latinLnBrk="0" hangingPunct="1">
+              <a:lnSpc>
+                <a:spcPct val="100000"/>
+              </a:lnSpc>
+              <a:spcBef>
+                <a:spcPts val="0"/>
+              </a:spcBef>
+              <a:spcAft>
+                <a:spcPts val="0"/>
+              </a:spcAft>
+              <a:buClrTx/>
+              <a:buSzTx/>
+              <a:buFontTx/>
+              <a:buNone/>
+              <a:tabLst/>
+              <a:defRPr/>
+            </a:pPr>
+            <a:r>
+              <a:rPr kumimoji="0" lang="en-US" sz="1400" b="1" i="0" u="none" strike="noStrike" kern="0" cap="none" spc="0" normalizeH="0" baseline="0" noProof="0" dirty="0">
+                <a:ln>
+                  <a:noFill/>
+                </a:ln>
+                <a:solidFill>
+                  <a:srgbClr val="002D72"/>
+                </a:solidFill>
+                <a:effectLst/>
+                <a:uLnTx/>
+                <a:uFillTx/>
+                <a:latin typeface="Helvetica" pitchFamily="2" charset="0"/>
+                <a:ea typeface="+mn-ea"/>
+                <a:cs typeface="+mn-cs"/>
+              </a:rPr>
+              <a:t>(4)</a:t>
+            </a:r>
+          </a:p>
+        </p:txBody>
+      </p:sp>
+      <p:sp>
+        <p:nvSpPr>
+          <p:cNvPr id="13" name="TextBox 12">
+            <a:extLst>
+              <a:ext uri="{FF2B5EF4-FFF2-40B4-BE49-F238E27FC236}">
+                <a16:creationId xmlns:a16="http://schemas.microsoft.com/office/drawing/2014/main" id="{93587737-46EA-315E-FAA1-7AF47956262C}"/>
+              </a:ext>
+            </a:extLst>
+          </p:cNvPr>
+          <p:cNvSpPr txBox="1"/>
+          <p:nvPr/>
+        </p:nvSpPr>
+        <p:spPr>
+          <a:xfrm>
+            <a:off x="7999944" y="1118521"/>
+            <a:ext cx="440691" cy="307777"/>
+          </a:xfrm>
+          <a:prstGeom prst="rect">
+            <a:avLst/>
+          </a:prstGeom>
+          <a:noFill/>
+        </p:spPr>
+        <p:txBody>
+          <a:bodyPr wrap="square" rtlCol="0">
+            <a:spAutoFit/>
+          </a:bodyPr>
+          <a:lstStyle/>
+          <a:p>
+            <a:pPr marL="0" marR="0" lvl="0" indent="0" algn="l" defTabSz="914400" rtl="0" eaLnBrk="1" fontAlgn="auto" latinLnBrk="0" hangingPunct="1">
+              <a:lnSpc>
+                <a:spcPct val="100000"/>
+              </a:lnSpc>
+              <a:spcBef>
+                <a:spcPts val="0"/>
+              </a:spcBef>
+              <a:spcAft>
+                <a:spcPts val="0"/>
+              </a:spcAft>
+              <a:buClrTx/>
+              <a:buSzTx/>
+              <a:buFontTx/>
+              <a:buNone/>
+              <a:tabLst/>
+              <a:defRPr/>
+            </a:pPr>
+            <a:r>
+              <a:rPr kumimoji="0" lang="en-US" sz="1400" b="1" i="0" u="none" strike="noStrike" kern="0" cap="none" spc="0" normalizeH="0" baseline="0" noProof="0" dirty="0">
+                <a:ln>
+                  <a:noFill/>
+                </a:ln>
+                <a:solidFill>
+                  <a:srgbClr val="002D72"/>
+                </a:solidFill>
+                <a:effectLst/>
+                <a:uLnTx/>
+                <a:uFillTx/>
+                <a:latin typeface="Helvetica" pitchFamily="2" charset="0"/>
+                <a:ea typeface="+mn-ea"/>
+                <a:cs typeface="+mn-cs"/>
+              </a:rPr>
+              <a:t>(4)</a:t>
+            </a:r>
+          </a:p>
+        </p:txBody>
+      </p:sp>
+      <p:sp>
+        <p:nvSpPr>
+          <p:cNvPr id="14" name="TextBox 13">
+            <a:extLst>
+              <a:ext uri="{FF2B5EF4-FFF2-40B4-BE49-F238E27FC236}">
+                <a16:creationId xmlns:a16="http://schemas.microsoft.com/office/drawing/2014/main" id="{84D39F7F-ECF8-4455-EBB7-4D18D84AABD4}"/>
+              </a:ext>
+            </a:extLst>
+          </p:cNvPr>
+          <p:cNvSpPr txBox="1"/>
+          <p:nvPr/>
+        </p:nvSpPr>
+        <p:spPr>
+          <a:xfrm>
+            <a:off x="9137977" y="1651980"/>
+            <a:ext cx="440691" cy="307777"/>
+          </a:xfrm>
+          <a:prstGeom prst="rect">
+            <a:avLst/>
+          </a:prstGeom>
+          <a:noFill/>
+        </p:spPr>
+        <p:txBody>
+          <a:bodyPr wrap="square" rtlCol="0">
+            <a:spAutoFit/>
+          </a:bodyPr>
+          <a:lstStyle/>
+          <a:p>
+            <a:pPr marL="0" marR="0" lvl="0" indent="0" algn="l" defTabSz="914400" rtl="0" eaLnBrk="1" fontAlgn="auto" latinLnBrk="0" hangingPunct="1">
+              <a:lnSpc>
+                <a:spcPct val="100000"/>
+              </a:lnSpc>
+              <a:spcBef>
+                <a:spcPts val="0"/>
+              </a:spcBef>
+              <a:spcAft>
+                <a:spcPts val="0"/>
+              </a:spcAft>
+              <a:buClrTx/>
+              <a:buSzTx/>
+              <a:buFontTx/>
+              <a:buNone/>
+              <a:tabLst/>
+              <a:defRPr/>
+            </a:pPr>
+            <a:r>
+              <a:rPr kumimoji="0" lang="en-US" sz="1400" b="1" i="0" u="none" strike="noStrike" kern="0" cap="none" spc="0" normalizeH="0" baseline="0" noProof="0" dirty="0">
+                <a:ln>
+                  <a:noFill/>
+                </a:ln>
+                <a:solidFill>
+                  <a:srgbClr val="002D72"/>
+                </a:solidFill>
+                <a:effectLst/>
+                <a:uLnTx/>
+                <a:uFillTx/>
+                <a:latin typeface="Helvetica" pitchFamily="2" charset="0"/>
+                <a:ea typeface="+mn-ea"/>
+                <a:cs typeface="+mn-cs"/>
+              </a:rPr>
+              <a:t>(5)</a:t>
+            </a:r>
+          </a:p>
+        </p:txBody>
+      </p:sp>
+      <p:sp>
+        <p:nvSpPr>
+          <p:cNvPr id="15" name="TextBox 14">
+            <a:extLst>
+              <a:ext uri="{FF2B5EF4-FFF2-40B4-BE49-F238E27FC236}">
+                <a16:creationId xmlns:a16="http://schemas.microsoft.com/office/drawing/2014/main" id="{90AF3D1C-DB58-D4FA-132D-73CC3E5B7188}"/>
+              </a:ext>
+            </a:extLst>
+          </p:cNvPr>
+          <p:cNvSpPr txBox="1"/>
+          <p:nvPr/>
+        </p:nvSpPr>
+        <p:spPr>
+          <a:xfrm>
+            <a:off x="9141986" y="2329236"/>
+            <a:ext cx="440691" cy="307777"/>
+          </a:xfrm>
+          <a:prstGeom prst="rect">
+            <a:avLst/>
+          </a:prstGeom>
+          <a:noFill/>
+        </p:spPr>
+        <p:txBody>
+          <a:bodyPr wrap="square" rtlCol="0">
+            <a:spAutoFit/>
+          </a:bodyPr>
+          <a:lstStyle/>
+          <a:p>
+            <a:pPr marL="0" marR="0" lvl="0" indent="0" algn="l" defTabSz="914400" rtl="0" eaLnBrk="1" fontAlgn="auto" latinLnBrk="0" hangingPunct="1">
+              <a:lnSpc>
+                <a:spcPct val="100000"/>
+              </a:lnSpc>
+              <a:spcBef>
+                <a:spcPts val="0"/>
+              </a:spcBef>
+              <a:spcAft>
+                <a:spcPts val="0"/>
+              </a:spcAft>
+              <a:buClrTx/>
+              <a:buSzTx/>
+              <a:buFontTx/>
+              <a:buNone/>
+              <a:tabLst/>
+              <a:defRPr/>
+            </a:pPr>
+            <a:r>
+              <a:rPr kumimoji="0" lang="en-US" sz="1400" b="1" i="0" u="none" strike="noStrike" kern="0" cap="none" spc="0" normalizeH="0" baseline="0" noProof="0" dirty="0">
+                <a:ln>
+                  <a:noFill/>
+                </a:ln>
+                <a:solidFill>
+                  <a:srgbClr val="002D72"/>
+                </a:solidFill>
+                <a:effectLst/>
+                <a:uLnTx/>
+                <a:uFillTx/>
+                <a:latin typeface="Helvetica" pitchFamily="2" charset="0"/>
+                <a:ea typeface="+mn-ea"/>
+                <a:cs typeface="+mn-cs"/>
+              </a:rPr>
+              <a:t>(6)</a:t>
+            </a:r>
+          </a:p>
+        </p:txBody>
+      </p:sp>
+      <p:sp>
+        <p:nvSpPr>
+          <p:cNvPr id="38" name="TextBox 37">
+            <a:extLst>
+              <a:ext uri="{FF2B5EF4-FFF2-40B4-BE49-F238E27FC236}">
+                <a16:creationId xmlns:a16="http://schemas.microsoft.com/office/drawing/2014/main" id="{80F901AE-1A73-F9FE-0792-E1E25F20D536}"/>
+              </a:ext>
+            </a:extLst>
+          </p:cNvPr>
+          <p:cNvSpPr txBox="1"/>
+          <p:nvPr/>
+        </p:nvSpPr>
+        <p:spPr>
+          <a:xfrm>
+            <a:off x="9764048" y="2806874"/>
+            <a:ext cx="440691" cy="276999"/>
+          </a:xfrm>
+          <a:prstGeom prst="rect">
+            <a:avLst/>
+          </a:prstGeom>
+          <a:noFill/>
+        </p:spPr>
+        <p:txBody>
+          <a:bodyPr wrap="square" rtlCol="0">
+            <a:spAutoFit/>
+          </a:bodyPr>
+          <a:lstStyle/>
+          <a:p>
+            <a:pPr marL="0" marR="0" lvl="0" indent="0" algn="l" defTabSz="914400" rtl="0" eaLnBrk="1" fontAlgn="auto" latinLnBrk="0" hangingPunct="1">
+              <a:lnSpc>
+                <a:spcPct val="100000"/>
+              </a:lnSpc>
+              <a:spcBef>
+                <a:spcPts val="0"/>
+              </a:spcBef>
+              <a:spcAft>
+                <a:spcPts val="0"/>
+              </a:spcAft>
+              <a:buClrTx/>
+              <a:buSzTx/>
+              <a:buFontTx/>
+              <a:buNone/>
+              <a:tabLst/>
+              <a:defRPr/>
+            </a:pPr>
+            <a:r>
+              <a:rPr kumimoji="0" lang="en-US" sz="1200" b="1" i="0" u="none" strike="noStrike" kern="0" cap="none" spc="0" normalizeH="0" baseline="0" noProof="0" dirty="0">
+                <a:ln>
+                  <a:noFill/>
+                </a:ln>
+                <a:solidFill>
+                  <a:srgbClr val="A02B93"/>
+                </a:solidFill>
+                <a:effectLst/>
+                <a:uLnTx/>
+                <a:uFillTx/>
+                <a:latin typeface="Helvetica" pitchFamily="2" charset="0"/>
+                <a:ea typeface="+mn-ea"/>
+                <a:cs typeface="+mn-cs"/>
+              </a:rPr>
+              <a:t>(7)</a:t>
+            </a:r>
+          </a:p>
+        </p:txBody>
+      </p:sp>
+      <p:sp>
+        <p:nvSpPr>
+          <p:cNvPr id="40" name="Rectangle 39">
+            <a:extLst>
+              <a:ext uri="{FF2B5EF4-FFF2-40B4-BE49-F238E27FC236}">
+                <a16:creationId xmlns:a16="http://schemas.microsoft.com/office/drawing/2014/main" id="{E822CA65-43FD-738E-3DB6-8890FF986E7D}"/>
+              </a:ext>
+            </a:extLst>
+          </p:cNvPr>
+          <p:cNvSpPr/>
+          <p:nvPr/>
+        </p:nvSpPr>
+        <p:spPr>
+          <a:xfrm>
+            <a:off x="393895" y="984738"/>
+            <a:ext cx="11479237" cy="5345724"/>
+          </a:xfrm>
+          <a:prstGeom prst="rect">
+            <a:avLst/>
+          </a:prstGeom>
+          <a:noFill/>
+          <a:ln>
+            <a:noFill/>
+          </a:ln>
+        </p:spPr>
+        <p:style>
+          <a:lnRef idx="2">
+            <a:schemeClr val="accent1">
+              <a:shade val="15000"/>
+            </a:schemeClr>
+          </a:lnRef>
+          <a:fillRef idx="1">
+            <a:schemeClr val="accent1"/>
+          </a:fillRef>
+          <a:effectRef idx="0">
+            <a:schemeClr val="accent1"/>
+          </a:effectRef>
+          <a:fontRef idx="minor">
+            <a:schemeClr val="lt1"/>
+          </a:fontRef>
+        </p:style>
+        <p:txBody>
+          <a:bodyPr rtlCol="0" anchor="ctr"/>
+          <a:lstStyle/>
+          <a:p>
+            <a:pPr marL="0" marR="0" lvl="0" indent="0" algn="ctr" defTabSz="914400" rtl="0" eaLnBrk="1" fontAlgn="auto" latinLnBrk="0" hangingPunct="1">
+              <a:lnSpc>
+                <a:spcPct val="100000"/>
+              </a:lnSpc>
+              <a:spcBef>
+                <a:spcPts val="0"/>
+              </a:spcBef>
+              <a:spcAft>
+                <a:spcPts val="0"/>
+              </a:spcAft>
+              <a:buClrTx/>
+              <a:buSzTx/>
+              <a:buFontTx/>
+              <a:buNone/>
+              <a:tabLst/>
+              <a:defRPr/>
+            </a:pPr>
+            <a:endParaRPr kumimoji="0" lang="en-US" sz="1800" b="0" i="0" u="none" strike="noStrike" kern="1200" cap="none" spc="0" normalizeH="0" baseline="0" noProof="0">
+              <a:ln>
+                <a:noFill/>
+              </a:ln>
+              <a:solidFill>
+                <a:prstClr val="white"/>
+              </a:solidFill>
+              <a:effectLst/>
+              <a:uLnTx/>
+              <a:uFillTx/>
+              <a:latin typeface="Aptos" panose="02110004020202020204"/>
+              <a:ea typeface="+mn-ea"/>
+              <a:cs typeface="+mn-cs"/>
+            </a:endParaRPr>
+          </a:p>
+        </p:txBody>
+      </p:sp>
+      <p:sp>
+        <p:nvSpPr>
+          <p:cNvPr id="16" name="Rectangle 15">
+            <a:extLst>
+              <a:ext uri="{FF2B5EF4-FFF2-40B4-BE49-F238E27FC236}">
+                <a16:creationId xmlns:a16="http://schemas.microsoft.com/office/drawing/2014/main" id="{257CA382-6E45-EBCA-775A-DC670C0889FA}"/>
+              </a:ext>
+            </a:extLst>
+          </p:cNvPr>
+          <p:cNvSpPr/>
+          <p:nvPr/>
+        </p:nvSpPr>
+        <p:spPr>
+          <a:xfrm>
+            <a:off x="3011711" y="1773058"/>
+            <a:ext cx="1639062" cy="754380"/>
+          </a:xfrm>
+          <a:prstGeom prst="rect">
+            <a:avLst/>
+          </a:prstGeom>
+          <a:solidFill>
+            <a:srgbClr val="418EDF">
+              <a:lumMod val="20000"/>
+              <a:lumOff val="80000"/>
+            </a:srgbClr>
+          </a:solidFill>
+          <a:ln w="28575" cap="flat" cmpd="sng" algn="ctr">
+            <a:solidFill>
+              <a:srgbClr val="002D72"/>
+            </a:solidFill>
+            <a:prstDash val="solid"/>
+            <a:miter lim="800000"/>
+          </a:ln>
+          <a:effectLst/>
+        </p:spPr>
+        <p:txBody>
+          <a:bodyPr rtlCol="0" anchor="ctr"/>
+          <a:lstStyle/>
+          <a:p>
+            <a:pPr marL="0" marR="0" lvl="0" indent="0" algn="ctr" defTabSz="685783" rtl="0" eaLnBrk="1" fontAlgn="auto" latinLnBrk="0" hangingPunct="1">
+              <a:lnSpc>
+                <a:spcPct val="100000"/>
+              </a:lnSpc>
+              <a:spcBef>
+                <a:spcPts val="0"/>
+              </a:spcBef>
+              <a:spcAft>
+                <a:spcPts val="0"/>
+              </a:spcAft>
+              <a:buClrTx/>
+              <a:buSzTx/>
+              <a:buFontTx/>
+              <a:buNone/>
+              <a:tabLst/>
+              <a:defRPr/>
+            </a:pPr>
+            <a:r>
+              <a:rPr kumimoji="0" lang="en-US" sz="1600" b="0" i="0" u="none" strike="noStrike" kern="0" cap="none" spc="0" normalizeH="0" baseline="0" noProof="0" dirty="0">
+                <a:ln>
+                  <a:noFill/>
+                </a:ln>
+                <a:solidFill>
+                  <a:prstClr val="black"/>
+                </a:solidFill>
+                <a:effectLst/>
+                <a:uLnTx/>
+                <a:uFillTx/>
+                <a:latin typeface="Helvetica" pitchFamily="2" charset="0"/>
+                <a:ea typeface="+mn-ea"/>
+                <a:cs typeface="Arial" panose="020B0604020202020204" pitchFamily="34" charset="0"/>
+              </a:rPr>
+              <a:t>HIV-positive, Undiagnosed</a:t>
+            </a:r>
+          </a:p>
+        </p:txBody>
+      </p:sp>
+      <p:sp>
+        <p:nvSpPr>
+          <p:cNvPr id="18" name="Rectangle 17">
+            <a:extLst>
+              <a:ext uri="{FF2B5EF4-FFF2-40B4-BE49-F238E27FC236}">
+                <a16:creationId xmlns:a16="http://schemas.microsoft.com/office/drawing/2014/main" id="{13E57E8F-4A7C-FCD2-6722-CEC79B23D091}"/>
+              </a:ext>
+            </a:extLst>
+          </p:cNvPr>
+          <p:cNvSpPr/>
+          <p:nvPr/>
+        </p:nvSpPr>
+        <p:spPr>
+          <a:xfrm>
+            <a:off x="905060" y="1773058"/>
+            <a:ext cx="1639062" cy="754380"/>
+          </a:xfrm>
+          <a:prstGeom prst="rect">
+            <a:avLst/>
+          </a:prstGeom>
+          <a:solidFill>
+            <a:srgbClr val="418EDF">
+              <a:lumMod val="20000"/>
+              <a:lumOff val="80000"/>
+            </a:srgbClr>
+          </a:solidFill>
+          <a:ln w="28575" cap="flat" cmpd="sng" algn="ctr">
+            <a:solidFill>
+              <a:srgbClr val="002D72"/>
+            </a:solidFill>
+            <a:prstDash val="solid"/>
+            <a:miter lim="800000"/>
+          </a:ln>
+          <a:effectLst/>
+        </p:spPr>
+        <p:txBody>
+          <a:bodyPr rtlCol="0" anchor="ctr"/>
+          <a:lstStyle/>
+          <a:p>
+            <a:pPr marL="0" marR="0" lvl="0" indent="0" algn="ctr" defTabSz="685783" rtl="0" eaLnBrk="1" fontAlgn="auto" latinLnBrk="0" hangingPunct="1">
+              <a:lnSpc>
+                <a:spcPct val="100000"/>
+              </a:lnSpc>
+              <a:spcBef>
+                <a:spcPts val="0"/>
+              </a:spcBef>
+              <a:spcAft>
+                <a:spcPts val="0"/>
+              </a:spcAft>
+              <a:buClrTx/>
+              <a:buSzTx/>
+              <a:buFontTx/>
+              <a:buNone/>
+              <a:tabLst/>
+              <a:defRPr/>
+            </a:pPr>
+            <a:r>
+              <a:rPr kumimoji="0" lang="en-US" sz="1600" b="0" i="0" u="none" strike="noStrike" kern="0" cap="none" spc="0" normalizeH="0" baseline="0" noProof="0" dirty="0">
+                <a:ln>
+                  <a:noFill/>
+                </a:ln>
+                <a:solidFill>
+                  <a:srgbClr val="000000"/>
+                </a:solidFill>
+                <a:effectLst/>
+                <a:uLnTx/>
+                <a:uFillTx/>
+                <a:latin typeface="Helvetica" pitchFamily="2" charset="0"/>
+                <a:ea typeface="+mn-ea"/>
+                <a:cs typeface="Arial" panose="020B0604020202020204" pitchFamily="34" charset="0"/>
+              </a:rPr>
+              <a:t>HIV-negative</a:t>
+            </a:r>
+          </a:p>
+        </p:txBody>
+      </p:sp>
+      <p:cxnSp>
+        <p:nvCxnSpPr>
+          <p:cNvPr id="20" name="Straight Arrow Connector 19">
+            <a:extLst>
+              <a:ext uri="{FF2B5EF4-FFF2-40B4-BE49-F238E27FC236}">
+                <a16:creationId xmlns:a16="http://schemas.microsoft.com/office/drawing/2014/main" id="{BF4A4A54-2589-1F69-3AE8-59E31FD9E563}"/>
+              </a:ext>
+            </a:extLst>
+          </p:cNvPr>
+          <p:cNvCxnSpPr>
+            <a:cxnSpLocks/>
+          </p:cNvCxnSpPr>
+          <p:nvPr/>
+        </p:nvCxnSpPr>
+        <p:spPr>
+          <a:xfrm flipH="1">
+            <a:off x="9032430" y="2338401"/>
+            <a:ext cx="615448" cy="0"/>
+          </a:xfrm>
+          <a:prstGeom prst="straightConnector1">
+            <a:avLst/>
+          </a:prstGeom>
+          <a:noFill/>
+          <a:ln w="38100" cap="flat" cmpd="sng" algn="ctr">
+            <a:solidFill>
+              <a:srgbClr val="002D72"/>
+            </a:solidFill>
+            <a:prstDash val="solid"/>
+            <a:tailEnd type="triangle" w="lg" len="med"/>
+          </a:ln>
+          <a:effectLst/>
+        </p:spPr>
+      </p:cxnSp>
+      <p:cxnSp>
+        <p:nvCxnSpPr>
+          <p:cNvPr id="21" name="Straight Arrow Connector 20">
+            <a:extLst>
+              <a:ext uri="{FF2B5EF4-FFF2-40B4-BE49-F238E27FC236}">
+                <a16:creationId xmlns:a16="http://schemas.microsoft.com/office/drawing/2014/main" id="{3A562AD3-244A-A918-4B87-9EAB3C012E23}"/>
+              </a:ext>
+            </a:extLst>
+          </p:cNvPr>
+          <p:cNvCxnSpPr>
+            <a:cxnSpLocks/>
+          </p:cNvCxnSpPr>
+          <p:nvPr/>
+        </p:nvCxnSpPr>
+        <p:spPr>
+          <a:xfrm>
+            <a:off x="6780000" y="1945350"/>
+            <a:ext cx="614408" cy="1498"/>
+          </a:xfrm>
+          <a:prstGeom prst="straightConnector1">
+            <a:avLst/>
+          </a:prstGeom>
+          <a:noFill/>
+          <a:ln w="38100" cap="flat" cmpd="sng" algn="ctr">
+            <a:solidFill>
+              <a:srgbClr val="002D72"/>
+            </a:solidFill>
+            <a:prstDash val="solid"/>
+            <a:tailEnd type="triangle" w="lg" len="med"/>
+          </a:ln>
+          <a:effectLst/>
+        </p:spPr>
+      </p:cxnSp>
+      <p:cxnSp>
+        <p:nvCxnSpPr>
+          <p:cNvPr id="22" name="Straight Arrow Connector 21">
+            <a:extLst>
+              <a:ext uri="{FF2B5EF4-FFF2-40B4-BE49-F238E27FC236}">
+                <a16:creationId xmlns:a16="http://schemas.microsoft.com/office/drawing/2014/main" id="{C46572D2-C724-08AB-C598-10F65E1F1E8B}"/>
+              </a:ext>
+            </a:extLst>
+          </p:cNvPr>
+          <p:cNvCxnSpPr>
+            <a:cxnSpLocks/>
+          </p:cNvCxnSpPr>
+          <p:nvPr/>
+        </p:nvCxnSpPr>
+        <p:spPr>
+          <a:xfrm flipH="1">
+            <a:off x="6780000" y="2272413"/>
+            <a:ext cx="614408" cy="0"/>
+          </a:xfrm>
+          <a:prstGeom prst="straightConnector1">
+            <a:avLst/>
+          </a:prstGeom>
+          <a:noFill/>
+          <a:ln w="38100" cap="flat" cmpd="sng" algn="ctr">
+            <a:solidFill>
+              <a:srgbClr val="002D72"/>
+            </a:solidFill>
+            <a:prstDash val="solid"/>
+            <a:tailEnd type="triangle" w="lg" len="med"/>
+          </a:ln>
+          <a:effectLst/>
+        </p:spPr>
+      </p:cxnSp>
+      <p:cxnSp>
+        <p:nvCxnSpPr>
+          <p:cNvPr id="23" name="Straight Arrow Connector 22">
+            <a:extLst>
+              <a:ext uri="{FF2B5EF4-FFF2-40B4-BE49-F238E27FC236}">
+                <a16:creationId xmlns:a16="http://schemas.microsoft.com/office/drawing/2014/main" id="{CD7CB400-2D6A-88DD-4C05-F0EA5141FBD5}"/>
+              </a:ext>
+            </a:extLst>
+          </p:cNvPr>
+          <p:cNvCxnSpPr>
+            <a:cxnSpLocks/>
+            <a:stCxn id="16" idx="3"/>
+            <a:endCxn id="25" idx="1"/>
+          </p:cNvCxnSpPr>
+          <p:nvPr/>
+        </p:nvCxnSpPr>
+        <p:spPr>
+          <a:xfrm>
+            <a:off x="4650773" y="2150248"/>
+            <a:ext cx="490166" cy="1499"/>
+          </a:xfrm>
+          <a:prstGeom prst="straightConnector1">
+            <a:avLst/>
+          </a:prstGeom>
+          <a:noFill/>
+          <a:ln w="38100" cap="flat" cmpd="sng" algn="ctr">
+            <a:solidFill>
+              <a:srgbClr val="002D72"/>
+            </a:solidFill>
+            <a:prstDash val="solid"/>
+            <a:tailEnd type="triangle" w="lg" len="med"/>
+          </a:ln>
+          <a:effectLst/>
+        </p:spPr>
+      </p:cxnSp>
+      <p:cxnSp>
+        <p:nvCxnSpPr>
+          <p:cNvPr id="24" name="Straight Arrow Connector 23">
+            <a:extLst>
+              <a:ext uri="{FF2B5EF4-FFF2-40B4-BE49-F238E27FC236}">
+                <a16:creationId xmlns:a16="http://schemas.microsoft.com/office/drawing/2014/main" id="{26931ADE-F2E8-7941-FA6C-E7D217DBA4B8}"/>
+              </a:ext>
+            </a:extLst>
+          </p:cNvPr>
+          <p:cNvCxnSpPr>
+            <a:cxnSpLocks/>
+            <a:stCxn id="18" idx="3"/>
+            <a:endCxn id="16" idx="1"/>
+          </p:cNvCxnSpPr>
+          <p:nvPr/>
+        </p:nvCxnSpPr>
+        <p:spPr>
+          <a:xfrm>
+            <a:off x="2544122" y="2150248"/>
+            <a:ext cx="467589" cy="0"/>
+          </a:xfrm>
+          <a:prstGeom prst="straightConnector1">
+            <a:avLst/>
+          </a:prstGeom>
+          <a:noFill/>
+          <a:ln w="38100" cap="flat" cmpd="sng" algn="ctr">
+            <a:solidFill>
+              <a:srgbClr val="002D72"/>
+            </a:solidFill>
+            <a:prstDash val="solid"/>
+            <a:tailEnd type="triangle" w="lg" len="med"/>
+          </a:ln>
+          <a:effectLst/>
+        </p:spPr>
+      </p:cxnSp>
+      <p:cxnSp>
+        <p:nvCxnSpPr>
+          <p:cNvPr id="27" name="Elbow Connector 26">
+            <a:extLst>
+              <a:ext uri="{FF2B5EF4-FFF2-40B4-BE49-F238E27FC236}">
+                <a16:creationId xmlns:a16="http://schemas.microsoft.com/office/drawing/2014/main" id="{AA502B9D-13B3-FB40-1AB6-10169C40E108}"/>
+              </a:ext>
+            </a:extLst>
+          </p:cNvPr>
+          <p:cNvCxnSpPr/>
+          <p:nvPr/>
+        </p:nvCxnSpPr>
+        <p:spPr>
+          <a:xfrm rot="16200000" flipV="1">
+            <a:off x="8213940" y="-478913"/>
+            <a:ext cx="12700" cy="4506939"/>
+          </a:xfrm>
+          <a:prstGeom prst="bentConnector3">
+            <a:avLst>
+              <a:gd name="adj1" fmla="val 2369150"/>
+            </a:avLst>
+          </a:prstGeom>
+          <a:noFill/>
+          <a:ln w="38100" cap="flat" cmpd="sng" algn="ctr">
+            <a:solidFill>
+              <a:srgbClr val="002D72"/>
+            </a:solidFill>
+            <a:prstDash val="solid"/>
+            <a:tailEnd type="triangle"/>
+          </a:ln>
+          <a:effectLst/>
+        </p:spPr>
+      </p:cxnSp>
+      <p:sp>
+        <p:nvSpPr>
+          <p:cNvPr id="26" name="Rectangle 25">
+            <a:extLst>
+              <a:ext uri="{FF2B5EF4-FFF2-40B4-BE49-F238E27FC236}">
+                <a16:creationId xmlns:a16="http://schemas.microsoft.com/office/drawing/2014/main" id="{483F6BA5-6C71-F2F6-63AD-F8948EA59846}"/>
+              </a:ext>
+            </a:extLst>
+          </p:cNvPr>
+          <p:cNvSpPr/>
+          <p:nvPr/>
+        </p:nvSpPr>
+        <p:spPr>
+          <a:xfrm>
+            <a:off x="9647878" y="1774557"/>
+            <a:ext cx="1639062" cy="754380"/>
+          </a:xfrm>
+          <a:prstGeom prst="rect">
+            <a:avLst/>
+          </a:prstGeom>
+          <a:solidFill>
+            <a:srgbClr val="418EDF">
+              <a:lumMod val="20000"/>
+              <a:lumOff val="80000"/>
+            </a:srgbClr>
+          </a:solidFill>
+          <a:ln w="28575" cap="flat" cmpd="sng" algn="ctr">
+            <a:solidFill>
+              <a:srgbClr val="002D72"/>
+            </a:solidFill>
+            <a:prstDash val="solid"/>
+            <a:miter lim="800000"/>
+          </a:ln>
+          <a:effectLst/>
+        </p:spPr>
+        <p:txBody>
+          <a:bodyPr rtlCol="0" anchor="ctr"/>
+          <a:lstStyle/>
+          <a:p>
+            <a:pPr marL="0" marR="0" lvl="0" indent="0" algn="ctr" defTabSz="685783" rtl="0" eaLnBrk="1" fontAlgn="auto" latinLnBrk="0" hangingPunct="1">
+              <a:lnSpc>
+                <a:spcPct val="100000"/>
+              </a:lnSpc>
+              <a:spcBef>
+                <a:spcPts val="0"/>
+              </a:spcBef>
+              <a:spcAft>
+                <a:spcPts val="0"/>
+              </a:spcAft>
+              <a:buClrTx/>
+              <a:buSzTx/>
+              <a:buFontTx/>
+              <a:buNone/>
+              <a:tabLst/>
+              <a:defRPr/>
+            </a:pPr>
+            <a:r>
+              <a:rPr kumimoji="0" lang="en-US" sz="1600" b="0" i="0" u="none" strike="noStrike" kern="0" cap="none" spc="0" normalizeH="0" baseline="0" noProof="0" dirty="0">
+                <a:ln>
+                  <a:noFill/>
+                </a:ln>
+                <a:solidFill>
+                  <a:prstClr val="black"/>
+                </a:solidFill>
+                <a:effectLst/>
+                <a:uLnTx/>
+                <a:uFillTx/>
+                <a:latin typeface="Helvetica" pitchFamily="2" charset="0"/>
+                <a:ea typeface="+mn-ea"/>
+                <a:cs typeface="Arial" panose="020B0604020202020204" pitchFamily="34" charset="0"/>
+              </a:rPr>
+              <a:t>Engaged,</a:t>
+            </a:r>
+          </a:p>
+          <a:p>
+            <a:pPr marL="0" marR="0" lvl="0" indent="0" algn="ctr" defTabSz="685783" rtl="0" eaLnBrk="1" fontAlgn="auto" latinLnBrk="0" hangingPunct="1">
+              <a:lnSpc>
+                <a:spcPct val="100000"/>
+              </a:lnSpc>
+              <a:spcBef>
+                <a:spcPts val="0"/>
+              </a:spcBef>
+              <a:spcAft>
+                <a:spcPts val="0"/>
+              </a:spcAft>
+              <a:buClrTx/>
+              <a:buSzTx/>
+              <a:buFontTx/>
+              <a:buNone/>
+              <a:tabLst/>
+              <a:defRPr/>
+            </a:pPr>
+            <a:r>
+              <a:rPr kumimoji="0" lang="en-US" sz="1600" b="0" i="0" u="none" strike="noStrike" kern="0" cap="none" spc="0" normalizeH="0" baseline="0" noProof="0" dirty="0">
+                <a:ln>
+                  <a:noFill/>
+                </a:ln>
+                <a:solidFill>
+                  <a:prstClr val="black"/>
+                </a:solidFill>
+                <a:effectLst/>
+                <a:uLnTx/>
+                <a:uFillTx/>
+                <a:latin typeface="Helvetica" pitchFamily="2" charset="0"/>
+                <a:ea typeface="+mn-ea"/>
+                <a:cs typeface="Arial" panose="020B0604020202020204" pitchFamily="34" charset="0"/>
+              </a:rPr>
+              <a:t>Suppressed</a:t>
+            </a:r>
+          </a:p>
+        </p:txBody>
+      </p:sp>
+      <p:cxnSp>
+        <p:nvCxnSpPr>
+          <p:cNvPr id="19" name="Straight Arrow Connector 18">
+            <a:extLst>
+              <a:ext uri="{FF2B5EF4-FFF2-40B4-BE49-F238E27FC236}">
+                <a16:creationId xmlns:a16="http://schemas.microsoft.com/office/drawing/2014/main" id="{022205FE-050E-7295-AD19-D454207D4B40}"/>
+              </a:ext>
+            </a:extLst>
+          </p:cNvPr>
+          <p:cNvCxnSpPr>
+            <a:cxnSpLocks/>
+          </p:cNvCxnSpPr>
+          <p:nvPr/>
+        </p:nvCxnSpPr>
+        <p:spPr>
+          <a:xfrm>
+            <a:off x="9032430" y="1954360"/>
+            <a:ext cx="615448" cy="0"/>
+          </a:xfrm>
+          <a:prstGeom prst="straightConnector1">
+            <a:avLst/>
+          </a:prstGeom>
+          <a:noFill/>
+          <a:ln w="38100" cap="flat" cmpd="sng" algn="ctr">
+            <a:solidFill>
+              <a:srgbClr val="002D72"/>
+            </a:solidFill>
+            <a:prstDash val="solid"/>
+            <a:tailEnd type="triangle" w="lg" len="med"/>
+          </a:ln>
+          <a:effectLst/>
+        </p:spPr>
+      </p:cxnSp>
+      <p:sp>
+        <p:nvSpPr>
+          <p:cNvPr id="17" name="Rectangle 16">
+            <a:extLst>
+              <a:ext uri="{FF2B5EF4-FFF2-40B4-BE49-F238E27FC236}">
+                <a16:creationId xmlns:a16="http://schemas.microsoft.com/office/drawing/2014/main" id="{E2021A01-CE5F-1EB7-9044-3EA896E43ED3}"/>
+              </a:ext>
+            </a:extLst>
+          </p:cNvPr>
+          <p:cNvSpPr/>
+          <p:nvPr/>
+        </p:nvSpPr>
+        <p:spPr>
+          <a:xfrm>
+            <a:off x="7394409" y="1776055"/>
+            <a:ext cx="1639062" cy="754380"/>
+          </a:xfrm>
+          <a:prstGeom prst="rect">
+            <a:avLst/>
+          </a:prstGeom>
+          <a:solidFill>
+            <a:srgbClr val="418EDF">
+              <a:lumMod val="20000"/>
+              <a:lumOff val="80000"/>
+            </a:srgbClr>
+          </a:solidFill>
+          <a:ln w="28575" cap="flat" cmpd="sng" algn="ctr">
+            <a:solidFill>
+              <a:srgbClr val="002D72"/>
+            </a:solidFill>
+            <a:prstDash val="solid"/>
+            <a:miter lim="800000"/>
+          </a:ln>
+          <a:effectLst/>
+        </p:spPr>
+        <p:txBody>
+          <a:bodyPr rtlCol="0" anchor="ctr"/>
+          <a:lstStyle/>
+          <a:p>
+            <a:pPr marL="0" marR="0" lvl="0" indent="0" algn="ctr" defTabSz="685783" rtl="0" eaLnBrk="1" fontAlgn="auto" latinLnBrk="0" hangingPunct="1">
+              <a:lnSpc>
+                <a:spcPct val="100000"/>
+              </a:lnSpc>
+              <a:spcBef>
+                <a:spcPts val="0"/>
+              </a:spcBef>
+              <a:spcAft>
+                <a:spcPts val="0"/>
+              </a:spcAft>
+              <a:buClrTx/>
+              <a:buSzTx/>
+              <a:buFontTx/>
+              <a:buNone/>
+              <a:tabLst/>
+              <a:defRPr/>
+            </a:pPr>
+            <a:r>
+              <a:rPr kumimoji="0" lang="en-US" sz="1600" b="0" i="0" u="none" strike="noStrike" kern="0" cap="none" spc="0" normalizeH="0" baseline="0" noProof="0" dirty="0">
+                <a:ln>
+                  <a:noFill/>
+                </a:ln>
+                <a:solidFill>
+                  <a:prstClr val="black"/>
+                </a:solidFill>
+                <a:effectLst/>
+                <a:uLnTx/>
+                <a:uFillTx/>
+                <a:latin typeface="Helvetica" pitchFamily="2" charset="0"/>
+                <a:ea typeface="+mn-ea"/>
+                <a:cs typeface="Arial" panose="020B0604020202020204" pitchFamily="34" charset="0"/>
+              </a:rPr>
+              <a:t>Engaged,</a:t>
+            </a:r>
+          </a:p>
+          <a:p>
+            <a:pPr marL="0" marR="0" lvl="0" indent="0" algn="ctr" defTabSz="685783" rtl="0" eaLnBrk="1" fontAlgn="auto" latinLnBrk="0" hangingPunct="1">
+              <a:lnSpc>
+                <a:spcPct val="100000"/>
+              </a:lnSpc>
+              <a:spcBef>
+                <a:spcPts val="0"/>
+              </a:spcBef>
+              <a:spcAft>
+                <a:spcPts val="0"/>
+              </a:spcAft>
+              <a:buClrTx/>
+              <a:buSzTx/>
+              <a:buFontTx/>
+              <a:buNone/>
+              <a:tabLst/>
+              <a:defRPr/>
+            </a:pPr>
+            <a:r>
+              <a:rPr kumimoji="0" lang="en-US" sz="1600" b="0" i="0" u="none" strike="noStrike" kern="0" cap="none" spc="0" normalizeH="0" baseline="0" noProof="0" dirty="0">
+                <a:ln>
+                  <a:noFill/>
+                </a:ln>
+                <a:solidFill>
+                  <a:prstClr val="black"/>
+                </a:solidFill>
+                <a:effectLst/>
+                <a:uLnTx/>
+                <a:uFillTx/>
+                <a:latin typeface="Helvetica" pitchFamily="2" charset="0"/>
+                <a:ea typeface="+mn-ea"/>
+                <a:cs typeface="Arial" panose="020B0604020202020204" pitchFamily="34" charset="0"/>
+              </a:rPr>
+              <a:t>Unsuppressed</a:t>
+            </a:r>
+          </a:p>
+        </p:txBody>
+      </p:sp>
+      <p:sp>
+        <p:nvSpPr>
+          <p:cNvPr id="25" name="Rectangle 24">
+            <a:extLst>
+              <a:ext uri="{FF2B5EF4-FFF2-40B4-BE49-F238E27FC236}">
+                <a16:creationId xmlns:a16="http://schemas.microsoft.com/office/drawing/2014/main" id="{21DD0393-FA3A-7695-4D50-EFC7B0D24ADC}"/>
+              </a:ext>
+            </a:extLst>
+          </p:cNvPr>
+          <p:cNvSpPr/>
+          <p:nvPr/>
+        </p:nvSpPr>
+        <p:spPr>
+          <a:xfrm>
+            <a:off x="5140939" y="1774557"/>
+            <a:ext cx="1639062" cy="754380"/>
+          </a:xfrm>
+          <a:prstGeom prst="rect">
+            <a:avLst/>
+          </a:prstGeom>
+          <a:solidFill>
+            <a:srgbClr val="418EDF">
+              <a:lumMod val="20000"/>
+              <a:lumOff val="80000"/>
+            </a:srgbClr>
+          </a:solidFill>
+          <a:ln w="28575" cap="flat" cmpd="sng" algn="ctr">
+            <a:solidFill>
+              <a:srgbClr val="002D72"/>
+            </a:solidFill>
+            <a:prstDash val="solid"/>
+            <a:miter lim="800000"/>
+          </a:ln>
+          <a:effectLst/>
+        </p:spPr>
+        <p:txBody>
+          <a:bodyPr rtlCol="0" anchor="ctr"/>
+          <a:lstStyle/>
+          <a:p>
+            <a:pPr marL="0" marR="0" lvl="0" indent="0" algn="ctr" defTabSz="685783" rtl="0" eaLnBrk="1" fontAlgn="auto" latinLnBrk="0" hangingPunct="1">
+              <a:lnSpc>
+                <a:spcPct val="100000"/>
+              </a:lnSpc>
+              <a:spcBef>
+                <a:spcPts val="0"/>
+              </a:spcBef>
+              <a:spcAft>
+                <a:spcPts val="0"/>
+              </a:spcAft>
+              <a:buClrTx/>
+              <a:buSzTx/>
+              <a:buFontTx/>
+              <a:buNone/>
+              <a:tabLst/>
+              <a:defRPr/>
+            </a:pPr>
+            <a:r>
+              <a:rPr kumimoji="0" lang="en-US" sz="1600" b="0" i="0" u="none" strike="noStrike" kern="0" cap="none" spc="0" normalizeH="0" baseline="0" noProof="0" dirty="0">
+                <a:ln>
+                  <a:noFill/>
+                </a:ln>
+                <a:solidFill>
+                  <a:prstClr val="black"/>
+                </a:solidFill>
+                <a:effectLst/>
+                <a:uLnTx/>
+                <a:uFillTx/>
+                <a:latin typeface="Helvetica" pitchFamily="2" charset="0"/>
+                <a:ea typeface="+mn-ea"/>
+                <a:cs typeface="Arial" panose="020B0604020202020204" pitchFamily="34" charset="0"/>
+              </a:rPr>
+              <a:t>Diagnosed,</a:t>
+            </a:r>
+          </a:p>
+          <a:p>
+            <a:pPr marL="0" marR="0" lvl="0" indent="0" algn="ctr" defTabSz="685783" rtl="0" eaLnBrk="1" fontAlgn="auto" latinLnBrk="0" hangingPunct="1">
+              <a:lnSpc>
+                <a:spcPct val="100000"/>
+              </a:lnSpc>
+              <a:spcBef>
+                <a:spcPts val="0"/>
+              </a:spcBef>
+              <a:spcAft>
+                <a:spcPts val="0"/>
+              </a:spcAft>
+              <a:buClrTx/>
+              <a:buSzTx/>
+              <a:buFontTx/>
+              <a:buNone/>
+              <a:tabLst/>
+              <a:defRPr/>
+            </a:pPr>
+            <a:r>
+              <a:rPr kumimoji="0" lang="en-US" sz="1600" b="0" i="0" u="none" strike="noStrike" kern="0" cap="none" spc="0" normalizeH="0" baseline="0" noProof="0" dirty="0">
+                <a:ln>
+                  <a:noFill/>
+                </a:ln>
+                <a:solidFill>
+                  <a:prstClr val="black"/>
+                </a:solidFill>
+                <a:effectLst/>
+                <a:uLnTx/>
+                <a:uFillTx/>
+                <a:latin typeface="Helvetica" pitchFamily="2" charset="0"/>
+                <a:ea typeface="+mn-ea"/>
+                <a:cs typeface="Arial" panose="020B0604020202020204" pitchFamily="34" charset="0"/>
+              </a:rPr>
+              <a:t>Unengaged</a:t>
+            </a:r>
+          </a:p>
+        </p:txBody>
+      </p:sp>
+      <p:sp>
+        <p:nvSpPr>
+          <p:cNvPr id="2" name="Rectangle 1">
+            <a:extLst>
+              <a:ext uri="{FF2B5EF4-FFF2-40B4-BE49-F238E27FC236}">
+                <a16:creationId xmlns:a16="http://schemas.microsoft.com/office/drawing/2014/main" id="{F9ED65C3-0EF5-D8E4-BE13-E46C60377C16}"/>
+              </a:ext>
+            </a:extLst>
+          </p:cNvPr>
+          <p:cNvSpPr/>
+          <p:nvPr/>
+        </p:nvSpPr>
+        <p:spPr>
+          <a:xfrm>
+            <a:off x="9647878" y="3483803"/>
+            <a:ext cx="1639062" cy="754380"/>
+          </a:xfrm>
+          <a:prstGeom prst="rect">
+            <a:avLst/>
+          </a:prstGeom>
+          <a:solidFill>
+            <a:srgbClr val="418EDF">
+              <a:lumMod val="20000"/>
+              <a:lumOff val="80000"/>
+            </a:srgbClr>
+          </a:solidFill>
+          <a:ln w="28575" cap="flat" cmpd="sng" algn="ctr">
+            <a:solidFill>
+              <a:srgbClr val="002D72"/>
+            </a:solidFill>
+            <a:prstDash val="solid"/>
+            <a:miter lim="800000"/>
+          </a:ln>
+          <a:effectLst/>
+        </p:spPr>
+        <p:txBody>
+          <a:bodyPr rtlCol="0" anchor="ctr"/>
+          <a:lstStyle/>
+          <a:p>
+            <a:pPr marL="0" marR="0" lvl="0" indent="0" algn="ctr" defTabSz="685783" rtl="0" eaLnBrk="1" fontAlgn="auto" latinLnBrk="0" hangingPunct="1">
+              <a:lnSpc>
+                <a:spcPct val="100000"/>
+              </a:lnSpc>
+              <a:spcBef>
+                <a:spcPts val="0"/>
+              </a:spcBef>
+              <a:spcAft>
+                <a:spcPts val="0"/>
+              </a:spcAft>
+              <a:buClrTx/>
+              <a:buSzTx/>
+              <a:buFontTx/>
+              <a:buNone/>
+              <a:tabLst/>
+              <a:defRPr/>
+            </a:pPr>
+            <a:r>
+              <a:rPr kumimoji="0" lang="en-US" sz="1600" b="0" i="0" u="none" strike="noStrike" kern="0" cap="none" spc="0" normalizeH="0" baseline="0" noProof="0" dirty="0">
+                <a:ln>
+                  <a:noFill/>
+                </a:ln>
+                <a:solidFill>
+                  <a:prstClr val="black"/>
+                </a:solidFill>
+                <a:effectLst/>
+                <a:uLnTx/>
+                <a:uFillTx/>
+                <a:latin typeface="Helvetica" pitchFamily="2" charset="0"/>
+                <a:ea typeface="+mn-ea"/>
+                <a:cs typeface="Arial" panose="020B0604020202020204" pitchFamily="34" charset="0"/>
+              </a:rPr>
+              <a:t>LAI ART</a:t>
+            </a:r>
+          </a:p>
+        </p:txBody>
+      </p:sp>
+      <p:sp>
+        <p:nvSpPr>
+          <p:cNvPr id="5" name="TextBox 4">
+            <a:extLst>
+              <a:ext uri="{FF2B5EF4-FFF2-40B4-BE49-F238E27FC236}">
+                <a16:creationId xmlns:a16="http://schemas.microsoft.com/office/drawing/2014/main" id="{356BC3E5-ECAC-7D30-ADDA-432B269B7B2E}"/>
+              </a:ext>
+            </a:extLst>
+          </p:cNvPr>
+          <p:cNvSpPr txBox="1"/>
+          <p:nvPr/>
+        </p:nvSpPr>
+        <p:spPr>
+          <a:xfrm>
+            <a:off x="905059" y="3160377"/>
+            <a:ext cx="5190941" cy="2862322"/>
+          </a:xfrm>
+          <a:prstGeom prst="rect">
+            <a:avLst/>
+          </a:prstGeom>
+          <a:noFill/>
+        </p:spPr>
+        <p:txBody>
+          <a:bodyPr wrap="square">
+            <a:spAutoFit/>
+          </a:bodyPr>
+          <a:lstStyle/>
+          <a:p>
+            <a:r>
+              <a:rPr lang="en-US" b="1" u="sng" dirty="0">
+                <a:solidFill>
+                  <a:srgbClr val="002D72"/>
+                </a:solidFill>
+                <a:latin typeface="Helvetica" pitchFamily="2" charset="0"/>
+              </a:rPr>
+              <a:t>Transitions along the continuum of care: </a:t>
+            </a:r>
+          </a:p>
+          <a:p>
+            <a:pPr marL="342900" indent="-342900">
+              <a:buFont typeface="+mj-lt"/>
+              <a:buAutoNum type="arabicParenR"/>
+            </a:pPr>
+            <a:r>
+              <a:rPr lang="en-US" dirty="0">
+                <a:solidFill>
+                  <a:srgbClr val="002D72"/>
+                </a:solidFill>
+                <a:latin typeface="Helvetica" pitchFamily="2" charset="0"/>
+              </a:rPr>
+              <a:t>HIV incidence</a:t>
+            </a:r>
+          </a:p>
+          <a:p>
+            <a:pPr marL="342900" indent="-342900">
+              <a:buFont typeface="+mj-lt"/>
+              <a:buAutoNum type="arabicParenR"/>
+            </a:pPr>
+            <a:r>
+              <a:rPr lang="en-US" dirty="0">
+                <a:solidFill>
+                  <a:srgbClr val="002D72"/>
+                </a:solidFill>
+                <a:latin typeface="Helvetica" pitchFamily="2" charset="0"/>
+              </a:rPr>
+              <a:t>HIV diagnosis</a:t>
+            </a:r>
+          </a:p>
+          <a:p>
+            <a:pPr marL="342900" indent="-342900">
+              <a:buFont typeface="+mj-lt"/>
+              <a:buAutoNum type="arabicParenR"/>
+            </a:pPr>
+            <a:r>
+              <a:rPr lang="en-US" dirty="0">
+                <a:solidFill>
+                  <a:srgbClr val="002D72"/>
+                </a:solidFill>
+                <a:latin typeface="Helvetica" pitchFamily="2" charset="0"/>
+              </a:rPr>
+              <a:t>Engagement in care</a:t>
+            </a:r>
+          </a:p>
+          <a:p>
+            <a:pPr marL="342900" indent="-342900">
+              <a:buFont typeface="+mj-lt"/>
+              <a:buAutoNum type="arabicParenR"/>
+            </a:pPr>
+            <a:r>
+              <a:rPr lang="en-US" dirty="0">
+                <a:solidFill>
+                  <a:srgbClr val="002D72"/>
+                </a:solidFill>
+                <a:latin typeface="Helvetica" pitchFamily="2" charset="0"/>
+              </a:rPr>
+              <a:t>Disengagement from care </a:t>
+            </a:r>
+          </a:p>
+          <a:p>
+            <a:pPr marL="342900" indent="-342900">
+              <a:buFont typeface="+mj-lt"/>
+              <a:buAutoNum type="arabicParenR"/>
+            </a:pPr>
+            <a:r>
+              <a:rPr lang="en-US" dirty="0">
+                <a:solidFill>
+                  <a:srgbClr val="002D72"/>
+                </a:solidFill>
+                <a:latin typeface="Helvetica" pitchFamily="2" charset="0"/>
+              </a:rPr>
+              <a:t>Gain of viral suppression </a:t>
+            </a:r>
+          </a:p>
+          <a:p>
+            <a:pPr marL="342900" indent="-342900">
+              <a:buFont typeface="+mj-lt"/>
+              <a:buAutoNum type="arabicParenR"/>
+            </a:pPr>
+            <a:r>
+              <a:rPr lang="en-US" dirty="0">
+                <a:solidFill>
+                  <a:srgbClr val="002D72"/>
+                </a:solidFill>
+                <a:latin typeface="Helvetica" pitchFamily="2" charset="0"/>
+              </a:rPr>
+              <a:t>Loss of viral suppression</a:t>
+            </a:r>
+          </a:p>
+          <a:p>
+            <a:pPr marL="342900" indent="-342900">
+              <a:buFont typeface="+mj-lt"/>
+              <a:buAutoNum type="arabicParenR"/>
+            </a:pPr>
+            <a:r>
+              <a:rPr lang="en-US" dirty="0">
+                <a:solidFill>
+                  <a:srgbClr val="7030A0"/>
+                </a:solidFill>
+                <a:latin typeface="Helvetica" pitchFamily="2" charset="0"/>
+              </a:rPr>
+              <a:t>LAI from engaged/suppressed (Cohort 1) </a:t>
+            </a:r>
+          </a:p>
+          <a:p>
+            <a:pPr marL="342900" indent="-342900">
+              <a:buFont typeface="+mj-lt"/>
+              <a:buAutoNum type="arabicParenR"/>
+            </a:pPr>
+            <a:r>
+              <a:rPr lang="en-US" dirty="0">
+                <a:solidFill>
+                  <a:schemeClr val="accent2"/>
+                </a:solidFill>
+                <a:latin typeface="Helvetica" pitchFamily="2" charset="0"/>
+              </a:rPr>
+              <a:t>LAI from engaged/unsuppressed (Cohort 2)</a:t>
+            </a:r>
+          </a:p>
+          <a:p>
+            <a:pPr marL="342900" indent="-342900">
+              <a:buFont typeface="+mj-lt"/>
+              <a:buAutoNum type="arabicParenR"/>
+            </a:pPr>
+            <a:r>
+              <a:rPr lang="en-US" dirty="0">
+                <a:solidFill>
+                  <a:srgbClr val="00B050"/>
+                </a:solidFill>
+                <a:latin typeface="Helvetica" pitchFamily="2" charset="0"/>
+              </a:rPr>
+              <a:t>LAI from ART naïve (Cohort 3)</a:t>
+            </a:r>
+          </a:p>
+        </p:txBody>
+      </p:sp>
+      <p:sp>
+        <p:nvSpPr>
+          <p:cNvPr id="7" name="TextBox 6">
+            <a:extLst>
+              <a:ext uri="{FF2B5EF4-FFF2-40B4-BE49-F238E27FC236}">
+                <a16:creationId xmlns:a16="http://schemas.microsoft.com/office/drawing/2014/main" id="{EC9FA2AB-6952-F8C9-3D2A-444E0280C8F8}"/>
+              </a:ext>
+            </a:extLst>
+          </p:cNvPr>
+          <p:cNvSpPr txBox="1"/>
+          <p:nvPr/>
+        </p:nvSpPr>
+        <p:spPr>
+          <a:xfrm>
+            <a:off x="8917631" y="2806874"/>
+            <a:ext cx="440691" cy="276999"/>
+          </a:xfrm>
+          <a:prstGeom prst="rect">
+            <a:avLst/>
+          </a:prstGeom>
+          <a:noFill/>
+        </p:spPr>
+        <p:txBody>
+          <a:bodyPr wrap="square" rtlCol="0">
+            <a:spAutoFit/>
+          </a:bodyPr>
+          <a:lstStyle/>
+          <a:p>
+            <a:pPr>
+              <a:defRPr/>
+            </a:pPr>
+            <a:r>
+              <a:rPr lang="en-US" sz="1200" b="1" kern="0" dirty="0">
+                <a:solidFill>
+                  <a:srgbClr val="E97132"/>
+                </a:solidFill>
+                <a:latin typeface="Helvetica" pitchFamily="2" charset="0"/>
+              </a:rPr>
+              <a:t>(8)</a:t>
+            </a:r>
+          </a:p>
+        </p:txBody>
+      </p:sp>
+      <p:sp>
+        <p:nvSpPr>
+          <p:cNvPr id="28" name="TextBox 27">
+            <a:extLst>
+              <a:ext uri="{FF2B5EF4-FFF2-40B4-BE49-F238E27FC236}">
+                <a16:creationId xmlns:a16="http://schemas.microsoft.com/office/drawing/2014/main" id="{19D7DE3D-A20C-F43F-E587-2CE3D56128FF}"/>
+              </a:ext>
+            </a:extLst>
+          </p:cNvPr>
+          <p:cNvSpPr txBox="1"/>
+          <p:nvPr/>
+        </p:nvSpPr>
+        <p:spPr>
+          <a:xfrm>
+            <a:off x="7833501" y="3012512"/>
+            <a:ext cx="440691" cy="276999"/>
+          </a:xfrm>
+          <a:prstGeom prst="rect">
+            <a:avLst/>
+          </a:prstGeom>
+          <a:noFill/>
+        </p:spPr>
+        <p:txBody>
+          <a:bodyPr wrap="square" rtlCol="0">
+            <a:spAutoFit/>
+          </a:bodyPr>
+          <a:lstStyle/>
+          <a:p>
+            <a:pPr marL="0" marR="0" lvl="0" indent="0" algn="l" defTabSz="914400" rtl="0" eaLnBrk="1" fontAlgn="auto" latinLnBrk="0" hangingPunct="1">
+              <a:lnSpc>
+                <a:spcPct val="100000"/>
+              </a:lnSpc>
+              <a:spcBef>
+                <a:spcPts val="0"/>
+              </a:spcBef>
+              <a:spcAft>
+                <a:spcPts val="0"/>
+              </a:spcAft>
+              <a:buClrTx/>
+              <a:buSzTx/>
+              <a:buFontTx/>
+              <a:buNone/>
+              <a:tabLst/>
+              <a:defRPr/>
+            </a:pPr>
+            <a:r>
+              <a:rPr kumimoji="0" lang="en-US" sz="1200" b="1" i="0" u="none" strike="noStrike" kern="0" cap="none" spc="0" normalizeH="0" baseline="0" noProof="0" dirty="0">
+                <a:ln>
+                  <a:noFill/>
+                </a:ln>
+                <a:solidFill>
+                  <a:srgbClr val="00B050"/>
+                </a:solidFill>
+                <a:effectLst/>
+                <a:uLnTx/>
+                <a:uFillTx/>
+                <a:latin typeface="Helvetica" pitchFamily="2" charset="0"/>
+                <a:ea typeface="+mn-ea"/>
+                <a:cs typeface="+mn-cs"/>
+              </a:rPr>
+              <a:t>(9)</a:t>
+            </a:r>
+          </a:p>
+        </p:txBody>
+      </p:sp>
+      <p:cxnSp>
+        <p:nvCxnSpPr>
+          <p:cNvPr id="31" name="Straight Arrow Connector 30">
+            <a:extLst>
+              <a:ext uri="{FF2B5EF4-FFF2-40B4-BE49-F238E27FC236}">
+                <a16:creationId xmlns:a16="http://schemas.microsoft.com/office/drawing/2014/main" id="{AC35168E-5364-8EA1-C56E-5226C9997FDC}"/>
+              </a:ext>
+            </a:extLst>
+          </p:cNvPr>
+          <p:cNvCxnSpPr>
+            <a:cxnSpLocks/>
+          </p:cNvCxnSpPr>
+          <p:nvPr/>
+        </p:nvCxnSpPr>
+        <p:spPr>
+          <a:xfrm>
+            <a:off x="10084236" y="2546075"/>
+            <a:ext cx="0" cy="948515"/>
+          </a:xfrm>
+          <a:prstGeom prst="straightConnector1">
+            <a:avLst/>
+          </a:prstGeom>
+          <a:noFill/>
+          <a:ln w="38100" cap="flat" cmpd="sng" algn="ctr">
+            <a:solidFill>
+              <a:srgbClr val="A02B93"/>
+            </a:solidFill>
+            <a:prstDash val="solid"/>
+            <a:tailEnd type="triangle" w="lg" len="med"/>
+          </a:ln>
+          <a:effectLst/>
+        </p:spPr>
+      </p:cxnSp>
+    </p:spTree>
+    <p:extLst>
+      <p:ext uri="{BB962C8B-B14F-4D97-AF65-F5344CB8AC3E}">
+        <p14:creationId xmlns:p14="http://schemas.microsoft.com/office/powerpoint/2010/main" val="631841281"/>
+      </p:ext>
+    </p:extLst>
+  </p:cSld>
+  <p:clrMapOvr>
+    <a:masterClrMapping/>
+  </p:clrMapOvr>
+</p:sld>
+</file>
+
 <file path=ppt/theme/theme1.xml><?xml version="1.0" encoding="utf-8"?>
 <a:theme xmlns:a="http://schemas.openxmlformats.org/drawingml/2006/main" name="Office Theme">
   <a:themeElements>
@@ -9526,4 +12327,319 @@
     </a:ext>
   </a:extLst>
 </a:theme>
+</file>
+
+<file path=ppt/theme/theme2.xml><?xml version="1.0" encoding="utf-8"?>
+<a:theme xmlns:a="http://schemas.openxmlformats.org/drawingml/2006/main" name="Office Theme">
+  <a:themeElements>
+    <a:clrScheme name="Office">
+      <a:dk1>
+        <a:sysClr val="windowText" lastClr="000000"/>
+      </a:dk1>
+      <a:lt1>
+        <a:sysClr val="window" lastClr="FFFFFF"/>
+      </a:lt1>
+      <a:dk2>
+        <a:srgbClr val="0E2841"/>
+      </a:dk2>
+      <a:lt2>
+        <a:srgbClr val="E8E8E8"/>
+      </a:lt2>
+      <a:accent1>
+        <a:srgbClr val="156082"/>
+      </a:accent1>
+      <a:accent2>
+        <a:srgbClr val="E97132"/>
+      </a:accent2>
+      <a:accent3>
+        <a:srgbClr val="196B24"/>
+      </a:accent3>
+      <a:accent4>
+        <a:srgbClr val="0F9ED5"/>
+      </a:accent4>
+      <a:accent5>
+        <a:srgbClr val="A02B93"/>
+      </a:accent5>
+      <a:accent6>
+        <a:srgbClr val="4EA72E"/>
+      </a:accent6>
+      <a:hlink>
+        <a:srgbClr val="467886"/>
+      </a:hlink>
+      <a:folHlink>
+        <a:srgbClr val="96607D"/>
+      </a:folHlink>
+    </a:clrScheme>
+    <a:fontScheme name="Office">
+      <a:majorFont>
+        <a:latin typeface="Aptos Display" panose="02110004020202020204"/>
+        <a:ea typeface=""/>
+        <a:cs typeface=""/>
+        <a:font script="Jpan" typeface="游ゴシック Light"/>
+        <a:font script="Hang" typeface="맑은 고딕"/>
+        <a:font script="Hans" typeface="等线 Light"/>
+        <a:font script="Hant" typeface="新細明體"/>
+        <a:font script="Arab" typeface="Times New Roman"/>
+        <a:font script="Hebr" typeface="Times New Roman"/>
+        <a:font script="Thai" typeface="Angsana New"/>
+        <a:font script="Ethi" typeface="Nyala"/>
+        <a:font script="Beng" typeface="Vrinda"/>
+        <a:font script="Gujr" typeface="Shruti"/>
+        <a:font script="Khmr" typeface="MoolBoran"/>
+        <a:font script="Knda" typeface="Tunga"/>
+        <a:font script="Guru" typeface="Raavi"/>
+        <a:font script="Cans" typeface="Euphemia"/>
+        <a:font script="Cher" typeface="Plantagenet Cherokee"/>
+        <a:font script="Yiii" typeface="Microsoft Yi Baiti"/>
+        <a:font script="Tibt" typeface="Microsoft Himalaya"/>
+        <a:font script="Thaa" typeface="MV Boli"/>
+        <a:font script="Deva" typeface="Mangal"/>
+        <a:font script="Telu" typeface="Gautami"/>
+        <a:font script="Taml" typeface="Latha"/>
+        <a:font script="Syrc" typeface="Estrangelo Edessa"/>
+        <a:font script="Orya" typeface="Kalinga"/>
+        <a:font script="Mlym" typeface="Kartika"/>
+        <a:font script="Laoo" typeface="DokChampa"/>
+        <a:font script="Sinh" typeface="Iskoola Pota"/>
+        <a:font script="Mong" typeface="Mongolian Baiti"/>
+        <a:font script="Viet" typeface="Times New Roman"/>
+        <a:font script="Uigh" typeface="Microsoft Uighur"/>
+        <a:font script="Geor" typeface="Sylfaen"/>
+        <a:font script="Armn" typeface="Arial"/>
+        <a:font script="Bugi" typeface="Leelawadee UI"/>
+        <a:font script="Bopo" typeface="Microsoft JhengHei"/>
+        <a:font script="Java" typeface="Javanese Text"/>
+        <a:font script="Lisu" typeface="Segoe UI"/>
+        <a:font script="Mymr" typeface="Myanmar Text"/>
+        <a:font script="Nkoo" typeface="Ebrima"/>
+        <a:font script="Olck" typeface="Nirmala UI"/>
+        <a:font script="Osma" typeface="Ebrima"/>
+        <a:font script="Phag" typeface="Phagspa"/>
+        <a:font script="Syrn" typeface="Estrangelo Edessa"/>
+        <a:font script="Syrj" typeface="Estrangelo Edessa"/>
+        <a:font script="Syre" typeface="Estrangelo Edessa"/>
+        <a:font script="Sora" typeface="Nirmala UI"/>
+        <a:font script="Tale" typeface="Microsoft Tai Le"/>
+        <a:font script="Talu" typeface="Microsoft New Tai Lue"/>
+        <a:font script="Tfng" typeface="Ebrima"/>
+      </a:majorFont>
+      <a:minorFont>
+        <a:latin typeface="Aptos" panose="02110004020202020204"/>
+        <a:ea typeface=""/>
+        <a:cs typeface=""/>
+        <a:font script="Jpan" typeface="游ゴシック"/>
+        <a:font script="Hang" typeface="맑은 고딕"/>
+        <a:font script="Hans" typeface="等线"/>
+        <a:font script="Hant" typeface="新細明體"/>
+        <a:font script="Arab" typeface="Arial"/>
+        <a:font script="Hebr" typeface="Arial"/>
+        <a:font script="Thai" typeface="Cordia New"/>
+        <a:font script="Ethi" typeface="Nyala"/>
+        <a:font script="Beng" typeface="Vrinda"/>
+        <a:font script="Gujr" typeface="Shruti"/>
+        <a:font script="Khmr" typeface="DaunPenh"/>
+        <a:font script="Knda" typeface="Tunga"/>
+        <a:font script="Guru" typeface="Raavi"/>
+        <a:font script="Cans" typeface="Euphemia"/>
+        <a:font script="Cher" typeface="Plantagenet Cherokee"/>
+        <a:font script="Yiii" typeface="Microsoft Yi Baiti"/>
+        <a:font script="Tibt" typeface="Microsoft Himalaya"/>
+        <a:font script="Thaa" typeface="MV Boli"/>
+        <a:font script="Deva" typeface="Mangal"/>
+        <a:font script="Telu" typeface="Gautami"/>
+        <a:font script="Taml" typeface="Latha"/>
+        <a:font script="Syrc" typeface="Estrangelo Edessa"/>
+        <a:font script="Orya" typeface="Kalinga"/>
+        <a:font script="Mlym" typeface="Kartika"/>
+        <a:font script="Laoo" typeface="DokChampa"/>
+        <a:font script="Sinh" typeface="Iskoola Pota"/>
+        <a:font script="Mong" typeface="Mongolian Baiti"/>
+        <a:font script="Viet" typeface="Arial"/>
+        <a:font script="Uigh" typeface="Microsoft Uighur"/>
+        <a:font script="Geor" typeface="Sylfaen"/>
+        <a:font script="Armn" typeface="Arial"/>
+        <a:font script="Bugi" typeface="Leelawadee UI"/>
+        <a:font script="Bopo" typeface="Microsoft JhengHei"/>
+        <a:font script="Java" typeface="Javanese Text"/>
+        <a:font script="Lisu" typeface="Segoe UI"/>
+        <a:font script="Mymr" typeface="Myanmar Text"/>
+        <a:font script="Nkoo" typeface="Ebrima"/>
+        <a:font script="Olck" typeface="Nirmala UI"/>
+        <a:font script="Osma" typeface="Ebrima"/>
+        <a:font script="Phag" typeface="Phagspa"/>
+        <a:font script="Syrn" typeface="Estrangelo Edessa"/>
+        <a:font script="Syrj" typeface="Estrangelo Edessa"/>
+        <a:font script="Syre" typeface="Estrangelo Edessa"/>
+        <a:font script="Sora" typeface="Nirmala UI"/>
+        <a:font script="Tale" typeface="Microsoft Tai Le"/>
+        <a:font script="Talu" typeface="Microsoft New Tai Lue"/>
+        <a:font script="Tfng" typeface="Ebrima"/>
+      </a:minorFont>
+    </a:fontScheme>
+    <a:fmtScheme name="Office">
+      <a:fillStyleLst>
+        <a:solidFill>
+          <a:schemeClr val="phClr"/>
+        </a:solidFill>
+        <a:gradFill rotWithShape="1">
+          <a:gsLst>
+            <a:gs pos="0">
+              <a:schemeClr val="phClr">
+                <a:lumMod val="110000"/>
+                <a:satMod val="105000"/>
+                <a:tint val="67000"/>
+              </a:schemeClr>
+            </a:gs>
+            <a:gs pos="50000">
+              <a:schemeClr val="phClr">
+                <a:lumMod val="105000"/>
+                <a:satMod val="103000"/>
+                <a:tint val="73000"/>
+              </a:schemeClr>
+            </a:gs>
+            <a:gs pos="100000">
+              <a:schemeClr val="phClr">
+                <a:lumMod val="105000"/>
+                <a:satMod val="109000"/>
+                <a:tint val="81000"/>
+              </a:schemeClr>
+            </a:gs>
+          </a:gsLst>
+          <a:lin ang="5400000" scaled="0"/>
+        </a:gradFill>
+        <a:gradFill rotWithShape="1">
+          <a:gsLst>
+            <a:gs pos="0">
+              <a:schemeClr val="phClr">
+                <a:satMod val="103000"/>
+                <a:lumMod val="102000"/>
+                <a:tint val="94000"/>
+              </a:schemeClr>
+            </a:gs>
+            <a:gs pos="50000">
+              <a:schemeClr val="phClr">
+                <a:satMod val="110000"/>
+                <a:lumMod val="100000"/>
+                <a:shade val="100000"/>
+              </a:schemeClr>
+            </a:gs>
+            <a:gs pos="100000">
+              <a:schemeClr val="phClr">
+                <a:lumMod val="99000"/>
+                <a:satMod val="120000"/>
+                <a:shade val="78000"/>
+              </a:schemeClr>
+            </a:gs>
+          </a:gsLst>
+          <a:lin ang="5400000" scaled="0"/>
+        </a:gradFill>
+      </a:fillStyleLst>
+      <a:lnStyleLst>
+        <a:ln w="12700" cap="flat" cmpd="sng" algn="ctr">
+          <a:solidFill>
+            <a:schemeClr val="phClr"/>
+          </a:solidFill>
+          <a:prstDash val="solid"/>
+          <a:miter lim="800000"/>
+        </a:ln>
+        <a:ln w="19050" cap="flat" cmpd="sng" algn="ctr">
+          <a:solidFill>
+            <a:schemeClr val="phClr"/>
+          </a:solidFill>
+          <a:prstDash val="solid"/>
+          <a:miter lim="800000"/>
+        </a:ln>
+        <a:ln w="25400" cap="flat" cmpd="sng" algn="ctr">
+          <a:solidFill>
+            <a:schemeClr val="phClr"/>
+          </a:solidFill>
+          <a:prstDash val="solid"/>
+          <a:miter lim="800000"/>
+        </a:ln>
+      </a:lnStyleLst>
+      <a:effectStyleLst>
+        <a:effectStyle>
+          <a:effectLst/>
+        </a:effectStyle>
+        <a:effectStyle>
+          <a:effectLst/>
+        </a:effectStyle>
+        <a:effectStyle>
+          <a:effectLst>
+            <a:outerShdw blurRad="57150" dist="19050" dir="5400000" algn="ctr" rotWithShape="0">
+              <a:srgbClr val="000000">
+                <a:alpha val="63000"/>
+              </a:srgbClr>
+            </a:outerShdw>
+          </a:effectLst>
+        </a:effectStyle>
+      </a:effectStyleLst>
+      <a:bgFillStyleLst>
+        <a:solidFill>
+          <a:schemeClr val="phClr"/>
+        </a:solidFill>
+        <a:solidFill>
+          <a:schemeClr val="phClr">
+            <a:tint val="95000"/>
+            <a:satMod val="170000"/>
+          </a:schemeClr>
+        </a:solidFill>
+        <a:gradFill rotWithShape="1">
+          <a:gsLst>
+            <a:gs pos="0">
+              <a:schemeClr val="phClr">
+                <a:tint val="93000"/>
+                <a:satMod val="150000"/>
+                <a:shade val="98000"/>
+                <a:lumMod val="102000"/>
+              </a:schemeClr>
+            </a:gs>
+            <a:gs pos="50000">
+              <a:schemeClr val="phClr">
+                <a:tint val="98000"/>
+                <a:satMod val="130000"/>
+                <a:shade val="90000"/>
+                <a:lumMod val="103000"/>
+              </a:schemeClr>
+            </a:gs>
+            <a:gs pos="100000">
+              <a:schemeClr val="phClr">
+                <a:shade val="63000"/>
+                <a:satMod val="120000"/>
+              </a:schemeClr>
+            </a:gs>
+          </a:gsLst>
+          <a:lin ang="5400000" scaled="0"/>
+        </a:gradFill>
+      </a:bgFillStyleLst>
+    </a:fmtScheme>
+  </a:themeElements>
+  <a:objectDefaults>
+    <a:lnDef>
+      <a:spPr/>
+      <a:bodyPr/>
+      <a:lstStyle/>
+      <a:style>
+        <a:lnRef idx="2">
+          <a:schemeClr val="accent1"/>
+        </a:lnRef>
+        <a:fillRef idx="0">
+          <a:schemeClr val="accent1"/>
+        </a:fillRef>
+        <a:effectRef idx="1">
+          <a:schemeClr val="accent1"/>
+        </a:effectRef>
+        <a:fontRef idx="minor">
+          <a:schemeClr val="tx1"/>
+        </a:fontRef>
+      </a:style>
+    </a:lnDef>
+  </a:objectDefaults>
+  <a:extraClrSchemeLst/>
+  <a:extLst>
+    <a:ext uri="{05A4C25C-085E-4340-85A3-A5531E510DB2}">
+      <thm15:themeFamily xmlns:thm15="http://schemas.microsoft.com/office/thememl/2012/main" name="Office Theme" id="{2E142A2C-CD16-42D6-873A-C26D2A0506FA}" vid="{1BDDFF52-6CD6-40A5-AB3C-68EB2F1E4D0A}"/>
+    </a:ext>
+  </a:extLst>
+</a:theme>
 </file>